--- a/public/lessons/year-6-maths/spring/week-13/multiply-a-fraction-by-a-whole-number/teaching-powerpoint-v1.pptx
+++ b/public/lessons/year-6-maths/spring/week-13/multiply-a-fraction-by-a-whole-number/teaching-powerpoint-v1.pptx
@@ -2,24 +2,24 @@
 <file path=ppt/presentation.xml><?xml version="1.0" encoding="utf-8"?>
 <p:presentation xmlns:p="http://schemas.openxmlformats.org/presentationml/2006/main">
   <p:sldMasterIdLst>
-    <p:sldMasterId xmlns:r="http://schemas.openxmlformats.org/officeDocument/2006/relationships" id="2147483648" r:id="R54546d16e37d4f1c"/>
+    <p:sldMasterId xmlns:r="http://schemas.openxmlformats.org/officeDocument/2006/relationships" id="2147483648" r:id="Rc1e2fc1c40494c84"/>
   </p:sldMasterIdLst>
   <p:notesMasterIdLst>
-    <p:notesMasterId xmlns:r="http://schemas.openxmlformats.org/officeDocument/2006/relationships" r:id="Rb9d914a1531d42c4"/>
+    <p:notesMasterId xmlns:r="http://schemas.openxmlformats.org/officeDocument/2006/relationships" r:id="R48c849bc98ec4a0f"/>
   </p:notesMasterIdLst>
   <p:sldIdLst>
-    <p:sldId xmlns:r="http://schemas.openxmlformats.org/officeDocument/2006/relationships" id="256" r:id="Rc9c5626ab7a74664"/>
-    <p:sldId xmlns:r="http://schemas.openxmlformats.org/officeDocument/2006/relationships" id="257" r:id="R057c8c7116614d4e"/>
-    <p:sldId xmlns:r="http://schemas.openxmlformats.org/officeDocument/2006/relationships" id="258" r:id="R276da42c8a2145ed"/>
-    <p:sldId xmlns:r="http://schemas.openxmlformats.org/officeDocument/2006/relationships" id="259" r:id="Rd9354555b24d4a5d"/>
-    <p:sldId xmlns:r="http://schemas.openxmlformats.org/officeDocument/2006/relationships" id="260" r:id="Rddb9343cee5c4484"/>
-    <p:sldId xmlns:r="http://schemas.openxmlformats.org/officeDocument/2006/relationships" id="261" r:id="Rbf6430984a894332"/>
-    <p:sldId xmlns:r="http://schemas.openxmlformats.org/officeDocument/2006/relationships" id="262" r:id="Rda7bac5f8eda4909"/>
-    <p:sldId xmlns:r="http://schemas.openxmlformats.org/officeDocument/2006/relationships" id="263" r:id="R2c1f41cd35344552"/>
-    <p:sldId xmlns:r="http://schemas.openxmlformats.org/officeDocument/2006/relationships" id="264" r:id="Rfbdc8edee3454480"/>
-    <p:sldId xmlns:r="http://schemas.openxmlformats.org/officeDocument/2006/relationships" id="265" r:id="R22b1155804aa4a9b"/>
-    <p:sldId xmlns:r="http://schemas.openxmlformats.org/officeDocument/2006/relationships" id="266" r:id="R7527e380fe1345bf"/>
-    <p:sldId xmlns:r="http://schemas.openxmlformats.org/officeDocument/2006/relationships" id="267" r:id="R670539f2c86f4068"/>
+    <p:sldId xmlns:r="http://schemas.openxmlformats.org/officeDocument/2006/relationships" id="256" r:id="Rc5275360ebfc49ce"/>
+    <p:sldId xmlns:r="http://schemas.openxmlformats.org/officeDocument/2006/relationships" id="257" r:id="Re32cdbc8a7eb41a1"/>
+    <p:sldId xmlns:r="http://schemas.openxmlformats.org/officeDocument/2006/relationships" id="258" r:id="R3d6437db8e9b4af2"/>
+    <p:sldId xmlns:r="http://schemas.openxmlformats.org/officeDocument/2006/relationships" id="259" r:id="R5380e4d7b6bb4dfa"/>
+    <p:sldId xmlns:r="http://schemas.openxmlformats.org/officeDocument/2006/relationships" id="260" r:id="Raf36b5d9dcbc4c42"/>
+    <p:sldId xmlns:r="http://schemas.openxmlformats.org/officeDocument/2006/relationships" id="261" r:id="R4b3d700f28fd4bbb"/>
+    <p:sldId xmlns:r="http://schemas.openxmlformats.org/officeDocument/2006/relationships" id="262" r:id="Rd821fdaa166e4bd1"/>
+    <p:sldId xmlns:r="http://schemas.openxmlformats.org/officeDocument/2006/relationships" id="263" r:id="R73097a43a16d4938"/>
+    <p:sldId xmlns:r="http://schemas.openxmlformats.org/officeDocument/2006/relationships" id="264" r:id="R45634f5149554add"/>
+    <p:sldId xmlns:r="http://schemas.openxmlformats.org/officeDocument/2006/relationships" id="265" r:id="R96cd7b01cc7145c5"/>
+    <p:sldId xmlns:r="http://schemas.openxmlformats.org/officeDocument/2006/relationships" id="266" r:id="R29853c71ea09430f"/>
+    <p:sldId xmlns:r="http://schemas.openxmlformats.org/officeDocument/2006/relationships" id="267" r:id="R54f108e344c641f3"/>
   </p:sldIdLst>
   <p:sldSz cx="12192000" cy="6858000"/>
   <p:notesSz cx="6858000" cy="9144000"/>
@@ -873,7 +873,7 @@
           <a:lstStyle xmlns:a="http://schemas.openxmlformats.org/drawingml/2006/main"/>
           <a:p xmlns:a="http://schemas.openxmlformats.org/drawingml/2006/main">
             <a:r>
-              <a:t>I do. Reveal the question, setup and each calculation stage one click at a time. Pupils watch before copying. Model answer: 12.</a:t>
+              <a:t>I do. Reveal the question, then reveal each mathematical change one click at a time. Point to the numbers and operation that changed before moving to the next line. Final answer: 12.</a:t>
             </a:r>
           </a:p>
         </p:txBody>
@@ -1291,7 +1291,7 @@
   </p:cSld>
   <p:clrMap bg1="lt1" tx1="dk1" bg2="lt2" tx2="dk2" accent1="accent1" accent2="accent2" accent3="accent3" accent4="accent4" accent5="accent5" accent6="accent6" hlink="hlink" folHlink="folHlink"/>
   <p:sldLayoutIdLst>
-    <p:sldLayoutId xmlns:r="http://schemas.openxmlformats.org/officeDocument/2006/relationships" id="2147483649" r:id="Rcaa7c8e5c2e647be"/>
+    <p:sldLayoutId xmlns:r="http://schemas.openxmlformats.org/officeDocument/2006/relationships" id="2147483649" r:id="Rba6ce3909ed34b26"/>
   </p:sldLayoutIdLst>
   <p:txStyles>
     <p:titleStyle>
@@ -1842,7 +1842,7 @@
           <p:cNvPr id="12" name="">
             <a:extLst xmlns:a="http://schemas.openxmlformats.org/drawingml/2006/main">
               <a:ext uri="{FF2B5EF4-FFF2-40B4-BE49-F238E27FC236}">
-                <a16:creationId xmlns:a16="http://schemas.microsoft.com/office/drawing/2014/main" id="{65062F6E-9192-43D9-BDC9-E5F13DAEAA10}"/>
+                <a16:creationId xmlns:a16="http://schemas.microsoft.com/office/drawing/2014/main" id="{AF77269A-DB6A-4C6D-957E-AAE083E3C52D}"/>
               </a:ext>
             </a:extLst>
           </p:cNvPr>
@@ -1874,7 +1874,7 @@
           <p:cNvPr id="2" name="">
             <a:extLst xmlns:a="http://schemas.openxmlformats.org/drawingml/2006/main">
               <a:ext uri="{FF2B5EF4-FFF2-40B4-BE49-F238E27FC236}">
-                <a16:creationId xmlns:a16="http://schemas.microsoft.com/office/drawing/2014/main" id="{769CB460-8BB5-4EA5-868F-B5E6E3B31F97}"/>
+                <a16:creationId xmlns:a16="http://schemas.microsoft.com/office/drawing/2014/main" id="{816A4C43-CD05-4050-B5B3-DAECC2ED11C7}"/>
               </a:ext>
             </a:extLst>
           </p:cNvPr>
@@ -1931,7 +1931,7 @@
           <p:cNvPr id="3" name="">
             <a:extLst xmlns:a="http://schemas.openxmlformats.org/drawingml/2006/main">
               <a:ext uri="{FF2B5EF4-FFF2-40B4-BE49-F238E27FC236}">
-                <a16:creationId xmlns:a16="http://schemas.microsoft.com/office/drawing/2014/main" id="{F6017022-1000-4BE1-A63C-252A4BFD5536}"/>
+                <a16:creationId xmlns:a16="http://schemas.microsoft.com/office/drawing/2014/main" id="{440C5DFE-24BC-4BF7-9ED7-D8493CB898EC}"/>
               </a:ext>
             </a:extLst>
           </p:cNvPr>
@@ -1965,7 +1965,7 @@
           <p:cNvPr id="4" name="">
             <a:extLst xmlns:a="http://schemas.openxmlformats.org/drawingml/2006/main">
               <a:ext uri="{FF2B5EF4-FFF2-40B4-BE49-F238E27FC236}">
-                <a16:creationId xmlns:a16="http://schemas.microsoft.com/office/drawing/2014/main" id="{0FEDA791-DF0A-442A-A6D4-92AAB348A863}"/>
+                <a16:creationId xmlns:a16="http://schemas.microsoft.com/office/drawing/2014/main" id="{7BD3A765-B520-41F7-916A-F4D4DBD13678}"/>
               </a:ext>
             </a:extLst>
           </p:cNvPr>
@@ -2022,7 +2022,7 @@
           <p:cNvPr id="5" name="">
             <a:extLst xmlns:a="http://schemas.openxmlformats.org/drawingml/2006/main">
               <a:ext uri="{FF2B5EF4-FFF2-40B4-BE49-F238E27FC236}">
-                <a16:creationId xmlns:a16="http://schemas.microsoft.com/office/drawing/2014/main" id="{C2EA4BA0-7BC6-48DA-A8DA-BB65C58DB111}"/>
+                <a16:creationId xmlns:a16="http://schemas.microsoft.com/office/drawing/2014/main" id="{85273B16-D0F8-49CD-9808-2CC7434019E8}"/>
               </a:ext>
             </a:extLst>
           </p:cNvPr>
@@ -2079,7 +2079,7 @@
           <p:cNvPr id="6" name="">
             <a:extLst xmlns:a="http://schemas.openxmlformats.org/drawingml/2006/main">
               <a:ext uri="{FF2B5EF4-FFF2-40B4-BE49-F238E27FC236}">
-                <a16:creationId xmlns:a16="http://schemas.microsoft.com/office/drawing/2014/main" id="{D4E41566-3F45-4781-B1C1-2302213F471F}"/>
+                <a16:creationId xmlns:a16="http://schemas.microsoft.com/office/drawing/2014/main" id="{DEB9105B-51DB-4AD6-BD37-C0AAE6DDD6DF}"/>
               </a:ext>
             </a:extLst>
           </p:cNvPr>
@@ -2113,7 +2113,7 @@
           <p:cNvPr id="7" name="">
             <a:extLst xmlns:a="http://schemas.openxmlformats.org/drawingml/2006/main">
               <a:ext uri="{FF2B5EF4-FFF2-40B4-BE49-F238E27FC236}">
-                <a16:creationId xmlns:a16="http://schemas.microsoft.com/office/drawing/2014/main" id="{34595991-008D-45B7-A193-4C35D77EF8BC}"/>
+                <a16:creationId xmlns:a16="http://schemas.microsoft.com/office/drawing/2014/main" id="{782F0779-9B49-4F67-BB6B-9DBC99230E55}"/>
               </a:ext>
             </a:extLst>
           </p:cNvPr>
@@ -2170,7 +2170,7 @@
           <p:cNvPr id="8" name="">
             <a:extLst xmlns:a="http://schemas.openxmlformats.org/drawingml/2006/main">
               <a:ext uri="{FF2B5EF4-FFF2-40B4-BE49-F238E27FC236}">
-                <a16:creationId xmlns:a16="http://schemas.microsoft.com/office/drawing/2014/main" id="{A4CE5C39-718D-43E0-810D-FB0C4B45852C}"/>
+                <a16:creationId xmlns:a16="http://schemas.microsoft.com/office/drawing/2014/main" id="{DF458501-88E8-44B8-9FD3-93ADCFFE76CC}"/>
               </a:ext>
             </a:extLst>
           </p:cNvPr>
@@ -2227,7 +2227,7 @@
           <p:cNvPr id="9" name="">
             <a:extLst xmlns:a="http://schemas.openxmlformats.org/drawingml/2006/main">
               <a:ext uri="{FF2B5EF4-FFF2-40B4-BE49-F238E27FC236}">
-                <a16:creationId xmlns:a16="http://schemas.microsoft.com/office/drawing/2014/main" id="{60D5269B-9132-4F69-9663-9CB49E61AE1D}"/>
+                <a16:creationId xmlns:a16="http://schemas.microsoft.com/office/drawing/2014/main" id="{30C82FB2-5A12-4E72-8905-095799B272D5}"/>
               </a:ext>
             </a:extLst>
           </p:cNvPr>
@@ -2284,7 +2284,7 @@
           <p:cNvPr id="10" name="">
             <a:extLst xmlns:a="http://schemas.openxmlformats.org/drawingml/2006/main">
               <a:ext uri="{FF2B5EF4-FFF2-40B4-BE49-F238E27FC236}">
-                <a16:creationId xmlns:a16="http://schemas.microsoft.com/office/drawing/2014/main" id="{00EAEFDF-80DF-478F-B139-C25C23D224AE}"/>
+                <a16:creationId xmlns:a16="http://schemas.microsoft.com/office/drawing/2014/main" id="{F20D6DC9-2252-4A15-AD87-BE273C886140}"/>
               </a:ext>
             </a:extLst>
           </p:cNvPr>
@@ -2341,7 +2341,7 @@
           <p:cNvPr id="11" name="">
             <a:extLst xmlns:a="http://schemas.openxmlformats.org/drawingml/2006/main">
               <a:ext uri="{FF2B5EF4-FFF2-40B4-BE49-F238E27FC236}">
-                <a16:creationId xmlns:a16="http://schemas.microsoft.com/office/drawing/2014/main" id="{FA79A978-47C6-40E3-953C-81E422CD0FEA}"/>
+                <a16:creationId xmlns:a16="http://schemas.microsoft.com/office/drawing/2014/main" id="{82A5AE55-C66E-4A2C-9175-78FF8AF1ED73}"/>
               </a:ext>
             </a:extLst>
           </p:cNvPr>
@@ -2396,7 +2396,7 @@
     </p:spTree>
     <p:extLst>
       <p:ext uri="{BB962C8B-B14F-4D97-AF65-F5344CB8AC3E}">
-        <p14:creationId xmlns:p14="http://schemas.microsoft.com/office/powerpoint/2010/main" val="1261776394"/>
+        <p14:creationId xmlns:p14="http://schemas.microsoft.com/office/powerpoint/2010/main" val="1319376589"/>
       </p:ext>
     </p:extLst>
   </p:cSld>
@@ -2427,7 +2427,7 @@
           <p:cNvPr id="14" name="">
             <a:extLst xmlns:a="http://schemas.openxmlformats.org/drawingml/2006/main">
               <a:ext uri="{FF2B5EF4-FFF2-40B4-BE49-F238E27FC236}">
-                <a16:creationId xmlns:a16="http://schemas.microsoft.com/office/drawing/2014/main" id="{A1F97692-F0F3-4D03-910F-511DA8F11CC4}"/>
+                <a16:creationId xmlns:a16="http://schemas.microsoft.com/office/drawing/2014/main" id="{86F247DC-544A-44CE-A9B2-507A0FF0725A}"/>
               </a:ext>
             </a:extLst>
           </p:cNvPr>
@@ -2459,7 +2459,7 @@
           <p:cNvPr id="2" name="">
             <a:extLst xmlns:a="http://schemas.openxmlformats.org/drawingml/2006/main">
               <a:ext uri="{FF2B5EF4-FFF2-40B4-BE49-F238E27FC236}">
-                <a16:creationId xmlns:a16="http://schemas.microsoft.com/office/drawing/2014/main" id="{44075B78-1911-4AB5-AE1E-DECCBF90DDBA}"/>
+                <a16:creationId xmlns:a16="http://schemas.microsoft.com/office/drawing/2014/main" id="{FF5082A1-0E62-4AA7-9571-CA9BBC405BAF}"/>
               </a:ext>
             </a:extLst>
           </p:cNvPr>
@@ -2516,7 +2516,7 @@
           <p:cNvPr id="3" name="">
             <a:extLst xmlns:a="http://schemas.openxmlformats.org/drawingml/2006/main">
               <a:ext uri="{FF2B5EF4-FFF2-40B4-BE49-F238E27FC236}">
-                <a16:creationId xmlns:a16="http://schemas.microsoft.com/office/drawing/2014/main" id="{C13805A1-5550-4AC7-AF74-3866207640C4}"/>
+                <a16:creationId xmlns:a16="http://schemas.microsoft.com/office/drawing/2014/main" id="{427968FB-A885-4C18-B275-3CF192B0395C}"/>
               </a:ext>
             </a:extLst>
           </p:cNvPr>
@@ -2548,7 +2548,7 @@
           <p:cNvPr id="4" name="">
             <a:extLst xmlns:a="http://schemas.openxmlformats.org/drawingml/2006/main">
               <a:ext uri="{FF2B5EF4-FFF2-40B4-BE49-F238E27FC236}">
-                <a16:creationId xmlns:a16="http://schemas.microsoft.com/office/drawing/2014/main" id="{C64D5ED1-F8CC-40D6-948D-5C88A00DB3A9}"/>
+                <a16:creationId xmlns:a16="http://schemas.microsoft.com/office/drawing/2014/main" id="{D2B62B15-AF1E-4988-83E9-27B46061EC6D}"/>
               </a:ext>
             </a:extLst>
           </p:cNvPr>
@@ -2605,7 +2605,7 @@
           <p:cNvPr id="5" name="">
             <a:extLst xmlns:a="http://schemas.openxmlformats.org/drawingml/2006/main">
               <a:ext uri="{FF2B5EF4-FFF2-40B4-BE49-F238E27FC236}">
-                <a16:creationId xmlns:a16="http://schemas.microsoft.com/office/drawing/2014/main" id="{DCC6CA49-658C-4201-A8B9-41BA72BC0551}"/>
+                <a16:creationId xmlns:a16="http://schemas.microsoft.com/office/drawing/2014/main" id="{262A333F-4BC2-4447-A063-4E17F4A095F1}"/>
               </a:ext>
             </a:extLst>
           </p:cNvPr>
@@ -2662,7 +2662,7 @@
           <p:cNvPr id="6" name="">
             <a:extLst xmlns:a="http://schemas.openxmlformats.org/drawingml/2006/main">
               <a:ext uri="{FF2B5EF4-FFF2-40B4-BE49-F238E27FC236}">
-                <a16:creationId xmlns:a16="http://schemas.microsoft.com/office/drawing/2014/main" id="{FB188339-1AE3-4005-9EFB-6560B08BDB15}"/>
+                <a16:creationId xmlns:a16="http://schemas.microsoft.com/office/drawing/2014/main" id="{7EC9CF47-961F-4EE2-BFD0-02B7AE1E5658}"/>
               </a:ext>
             </a:extLst>
           </p:cNvPr>
@@ -2719,7 +2719,7 @@
           <p:cNvPr id="7" name="">
             <a:extLst xmlns:a="http://schemas.openxmlformats.org/drawingml/2006/main">
               <a:ext uri="{FF2B5EF4-FFF2-40B4-BE49-F238E27FC236}">
-                <a16:creationId xmlns:a16="http://schemas.microsoft.com/office/drawing/2014/main" id="{329A3E5B-55E5-42E1-8F2A-0676FA37F6F9}"/>
+                <a16:creationId xmlns:a16="http://schemas.microsoft.com/office/drawing/2014/main" id="{751E4FFD-991F-4A89-8874-BEA68D2FB426}"/>
               </a:ext>
             </a:extLst>
           </p:cNvPr>
@@ -2751,7 +2751,7 @@
           <p:cNvPr id="8" name="">
             <a:extLst xmlns:a="http://schemas.openxmlformats.org/drawingml/2006/main">
               <a:ext uri="{FF2B5EF4-FFF2-40B4-BE49-F238E27FC236}">
-                <a16:creationId xmlns:a16="http://schemas.microsoft.com/office/drawing/2014/main" id="{9F439C5E-2E2D-44E6-B6B6-9C31738A806E}"/>
+                <a16:creationId xmlns:a16="http://schemas.microsoft.com/office/drawing/2014/main" id="{3F0BFCC6-649E-4FE5-A530-6FB2356048A4}"/>
               </a:ext>
             </a:extLst>
           </p:cNvPr>
@@ -2808,7 +2808,7 @@
           <p:cNvPr id="9" name="">
             <a:extLst xmlns:a="http://schemas.openxmlformats.org/drawingml/2006/main">
               <a:ext uri="{FF2B5EF4-FFF2-40B4-BE49-F238E27FC236}">
-                <a16:creationId xmlns:a16="http://schemas.microsoft.com/office/drawing/2014/main" id="{D71310EE-B316-4C77-A938-0F34C7CD81D0}"/>
+                <a16:creationId xmlns:a16="http://schemas.microsoft.com/office/drawing/2014/main" id="{46FBA3CA-39C4-4576-9873-BBD463BFA5F3}"/>
               </a:ext>
             </a:extLst>
           </p:cNvPr>
@@ -2865,7 +2865,7 @@
           <p:cNvPr id="10" name="">
             <a:extLst xmlns:a="http://schemas.openxmlformats.org/drawingml/2006/main">
               <a:ext uri="{FF2B5EF4-FFF2-40B4-BE49-F238E27FC236}">
-                <a16:creationId xmlns:a16="http://schemas.microsoft.com/office/drawing/2014/main" id="{68DED602-FB75-4153-9C0F-CF7DE8BDBC9D}"/>
+                <a16:creationId xmlns:a16="http://schemas.microsoft.com/office/drawing/2014/main" id="{A904ED5C-5375-4AD0-843E-7A9E6E65D093}"/>
               </a:ext>
             </a:extLst>
           </p:cNvPr>
@@ -2922,7 +2922,7 @@
           <p:cNvPr id="11" name="">
             <a:extLst xmlns:a="http://schemas.openxmlformats.org/drawingml/2006/main">
               <a:ext uri="{FF2B5EF4-FFF2-40B4-BE49-F238E27FC236}">
-                <a16:creationId xmlns:a16="http://schemas.microsoft.com/office/drawing/2014/main" id="{6B86BB43-2DB5-46EA-9AC9-00B7B9C91D55}"/>
+                <a16:creationId xmlns:a16="http://schemas.microsoft.com/office/drawing/2014/main" id="{C9536E06-4DA6-43FB-BFDD-6CD85D4CD4B3}"/>
               </a:ext>
             </a:extLst>
           </p:cNvPr>
@@ -2979,7 +2979,7 @@
           <p:cNvPr id="12" name="">
             <a:extLst xmlns:a="http://schemas.openxmlformats.org/drawingml/2006/main">
               <a:ext uri="{FF2B5EF4-FFF2-40B4-BE49-F238E27FC236}">
-                <a16:creationId xmlns:a16="http://schemas.microsoft.com/office/drawing/2014/main" id="{8AB48F92-981F-4572-BCB7-3ABE16361866}"/>
+                <a16:creationId xmlns:a16="http://schemas.microsoft.com/office/drawing/2014/main" id="{23FAE335-6815-4097-90FF-CF6EAE419909}"/>
               </a:ext>
             </a:extLst>
           </p:cNvPr>
@@ -3036,7 +3036,7 @@
           <p:cNvPr id="13" name="">
             <a:extLst xmlns:a="http://schemas.openxmlformats.org/drawingml/2006/main">
               <a:ext uri="{FF2B5EF4-FFF2-40B4-BE49-F238E27FC236}">
-                <a16:creationId xmlns:a16="http://schemas.microsoft.com/office/drawing/2014/main" id="{08F47A05-5BED-4BFD-8549-674973B76E06}"/>
+                <a16:creationId xmlns:a16="http://schemas.microsoft.com/office/drawing/2014/main" id="{E1A22714-ED34-460B-A52A-563E6096D08A}"/>
               </a:ext>
             </a:extLst>
           </p:cNvPr>
@@ -3091,7 +3091,7 @@
     </p:spTree>
     <p:extLst>
       <p:ext uri="{BB962C8B-B14F-4D97-AF65-F5344CB8AC3E}">
-        <p14:creationId xmlns:p14="http://schemas.microsoft.com/office/powerpoint/2010/main" val="1217290444"/>
+        <p14:creationId xmlns:p14="http://schemas.microsoft.com/office/powerpoint/2010/main" val="437346438"/>
       </p:ext>
     </p:extLst>
   </p:cSld>
@@ -3292,7 +3292,7 @@
           <p:cNvPr id="19" name="">
             <a:extLst xmlns:a="http://schemas.openxmlformats.org/drawingml/2006/main">
               <a:ext uri="{FF2B5EF4-FFF2-40B4-BE49-F238E27FC236}">
-                <a16:creationId xmlns:a16="http://schemas.microsoft.com/office/drawing/2014/main" id="{6B602917-FDAA-466C-9E23-94A69AA8A2F2}"/>
+                <a16:creationId xmlns:a16="http://schemas.microsoft.com/office/drawing/2014/main" id="{D613527E-BEA9-43C9-B51A-615CEFA4DC70}"/>
               </a:ext>
             </a:extLst>
           </p:cNvPr>
@@ -3324,7 +3324,7 @@
           <p:cNvPr id="2" name="">
             <a:extLst xmlns:a="http://schemas.openxmlformats.org/drawingml/2006/main">
               <a:ext uri="{FF2B5EF4-FFF2-40B4-BE49-F238E27FC236}">
-                <a16:creationId xmlns:a16="http://schemas.microsoft.com/office/drawing/2014/main" id="{C6E4D29F-EF65-45AB-AD75-B39EE77BD7C5}"/>
+                <a16:creationId xmlns:a16="http://schemas.microsoft.com/office/drawing/2014/main" id="{E89E0A34-78E5-4839-9824-C63C335C0F17}"/>
               </a:ext>
             </a:extLst>
           </p:cNvPr>
@@ -3381,7 +3381,7 @@
           <p:cNvPr id="3" name="">
             <a:extLst xmlns:a="http://schemas.openxmlformats.org/drawingml/2006/main">
               <a:ext uri="{FF2B5EF4-FFF2-40B4-BE49-F238E27FC236}">
-                <a16:creationId xmlns:a16="http://schemas.microsoft.com/office/drawing/2014/main" id="{8034125B-8D12-4FFD-B47F-C611B0F31D30}"/>
+                <a16:creationId xmlns:a16="http://schemas.microsoft.com/office/drawing/2014/main" id="{FFB0F86F-FCE1-4E5F-B89A-CA9ADE04A265}"/>
               </a:ext>
             </a:extLst>
           </p:cNvPr>
@@ -3413,7 +3413,7 @@
           <p:cNvPr id="4" name="">
             <a:extLst xmlns:a="http://schemas.openxmlformats.org/drawingml/2006/main">
               <a:ext uri="{FF2B5EF4-FFF2-40B4-BE49-F238E27FC236}">
-                <a16:creationId xmlns:a16="http://schemas.microsoft.com/office/drawing/2014/main" id="{7F6CCFD1-E426-4759-BAF2-E51A3455097D}"/>
+                <a16:creationId xmlns:a16="http://schemas.microsoft.com/office/drawing/2014/main" id="{9DEF4E58-E3F5-4430-B815-231F25D0493D}"/>
               </a:ext>
             </a:extLst>
           </p:cNvPr>
@@ -3470,7 +3470,7 @@
           <p:cNvPr id="5" name="">
             <a:extLst xmlns:a="http://schemas.openxmlformats.org/drawingml/2006/main">
               <a:ext uri="{FF2B5EF4-FFF2-40B4-BE49-F238E27FC236}">
-                <a16:creationId xmlns:a16="http://schemas.microsoft.com/office/drawing/2014/main" id="{ADF0A347-878C-453A-B572-DA5C11937399}"/>
+                <a16:creationId xmlns:a16="http://schemas.microsoft.com/office/drawing/2014/main" id="{32DCDEE4-AA83-4564-A996-7546A236DC21}"/>
               </a:ext>
             </a:extLst>
           </p:cNvPr>
@@ -3527,7 +3527,7 @@
           <p:cNvPr id="6" name="">
             <a:extLst xmlns:a="http://schemas.openxmlformats.org/drawingml/2006/main">
               <a:ext uri="{FF2B5EF4-FFF2-40B4-BE49-F238E27FC236}">
-                <a16:creationId xmlns:a16="http://schemas.microsoft.com/office/drawing/2014/main" id="{816A09A4-A1CE-45D1-AF49-60BBC7F3729E}"/>
+                <a16:creationId xmlns:a16="http://schemas.microsoft.com/office/drawing/2014/main" id="{A94F552E-B3B1-466D-A083-991E141F5F59}"/>
               </a:ext>
             </a:extLst>
           </p:cNvPr>
@@ -3584,7 +3584,7 @@
           <p:cNvPr id="7" name="">
             <a:extLst xmlns:a="http://schemas.openxmlformats.org/drawingml/2006/main">
               <a:ext uri="{FF2B5EF4-FFF2-40B4-BE49-F238E27FC236}">
-                <a16:creationId xmlns:a16="http://schemas.microsoft.com/office/drawing/2014/main" id="{6F1D88F0-1A1F-4E21-9930-C05E85951610}"/>
+                <a16:creationId xmlns:a16="http://schemas.microsoft.com/office/drawing/2014/main" id="{CE2F5013-1B2D-4EB8-9BDB-04DF6BFA1E9D}"/>
               </a:ext>
             </a:extLst>
           </p:cNvPr>
@@ -3616,7 +3616,7 @@
           <p:cNvPr id="8" name="">
             <a:extLst xmlns:a="http://schemas.openxmlformats.org/drawingml/2006/main">
               <a:ext uri="{FF2B5EF4-FFF2-40B4-BE49-F238E27FC236}">
-                <a16:creationId xmlns:a16="http://schemas.microsoft.com/office/drawing/2014/main" id="{3F9A2504-7355-4ECF-BDC8-11CC7E0AAF83}"/>
+                <a16:creationId xmlns:a16="http://schemas.microsoft.com/office/drawing/2014/main" id="{89EFB930-1DD1-4EB8-A22B-259EF4D99143}"/>
               </a:ext>
             </a:extLst>
           </p:cNvPr>
@@ -3673,7 +3673,7 @@
           <p:cNvPr id="9" name="">
             <a:extLst xmlns:a="http://schemas.openxmlformats.org/drawingml/2006/main">
               <a:ext uri="{FF2B5EF4-FFF2-40B4-BE49-F238E27FC236}">
-                <a16:creationId xmlns:a16="http://schemas.microsoft.com/office/drawing/2014/main" id="{9E69FAD2-C5E7-4AFB-9BD6-4C6784BAD749}"/>
+                <a16:creationId xmlns:a16="http://schemas.microsoft.com/office/drawing/2014/main" id="{7A2E8C29-7996-4F57-BAAC-B9BE635B0C27}"/>
               </a:ext>
             </a:extLst>
           </p:cNvPr>
@@ -3730,7 +3730,7 @@
           <p:cNvPr id="10" name="">
             <a:extLst xmlns:a="http://schemas.openxmlformats.org/drawingml/2006/main">
               <a:ext uri="{FF2B5EF4-FFF2-40B4-BE49-F238E27FC236}">
-                <a16:creationId xmlns:a16="http://schemas.microsoft.com/office/drawing/2014/main" id="{EB915CA7-D7A6-45FA-B330-9FD1DC1C0F87}"/>
+                <a16:creationId xmlns:a16="http://schemas.microsoft.com/office/drawing/2014/main" id="{1184E170-A271-4331-BA2A-5917887D9211}"/>
               </a:ext>
             </a:extLst>
           </p:cNvPr>
@@ -3787,7 +3787,7 @@
           <p:cNvPr id="11" name="">
             <a:extLst xmlns:a="http://schemas.openxmlformats.org/drawingml/2006/main">
               <a:ext uri="{FF2B5EF4-FFF2-40B4-BE49-F238E27FC236}">
-                <a16:creationId xmlns:a16="http://schemas.microsoft.com/office/drawing/2014/main" id="{94DE3387-3A95-4506-A49B-4FE02A73433F}"/>
+                <a16:creationId xmlns:a16="http://schemas.microsoft.com/office/drawing/2014/main" id="{58905E7E-141A-4E31-A240-B72BF63C8FA5}"/>
               </a:ext>
             </a:extLst>
           </p:cNvPr>
@@ -3821,7 +3821,7 @@
           <p:cNvPr id="12" name="">
             <a:extLst xmlns:a="http://schemas.openxmlformats.org/drawingml/2006/main">
               <a:ext uri="{FF2B5EF4-FFF2-40B4-BE49-F238E27FC236}">
-                <a16:creationId xmlns:a16="http://schemas.microsoft.com/office/drawing/2014/main" id="{4E0D1DE0-F53D-4856-9C0C-BBC8AE19D307}"/>
+                <a16:creationId xmlns:a16="http://schemas.microsoft.com/office/drawing/2014/main" id="{79CEB196-7192-451A-BAEB-0F79142A7C17}"/>
               </a:ext>
             </a:extLst>
           </p:cNvPr>
@@ -3878,7 +3878,7 @@
           <p:cNvPr id="13" name="">
             <a:extLst xmlns:a="http://schemas.openxmlformats.org/drawingml/2006/main">
               <a:ext uri="{FF2B5EF4-FFF2-40B4-BE49-F238E27FC236}">
-                <a16:creationId xmlns:a16="http://schemas.microsoft.com/office/drawing/2014/main" id="{D8A115D8-16AE-4AB2-A940-D46329F1D482}"/>
+                <a16:creationId xmlns:a16="http://schemas.microsoft.com/office/drawing/2014/main" id="{9193FB54-CB3C-4EDD-ACC4-E71873BFDC36}"/>
               </a:ext>
             </a:extLst>
           </p:cNvPr>
@@ -3935,7 +3935,7 @@
           <p:cNvPr id="14" name="">
             <a:extLst xmlns:a="http://schemas.openxmlformats.org/drawingml/2006/main">
               <a:ext uri="{FF2B5EF4-FFF2-40B4-BE49-F238E27FC236}">
-                <a16:creationId xmlns:a16="http://schemas.microsoft.com/office/drawing/2014/main" id="{B0827D18-564A-40B9-B696-9B8B4A77EC38}"/>
+                <a16:creationId xmlns:a16="http://schemas.microsoft.com/office/drawing/2014/main" id="{B8D92F29-68C9-4422-ACB6-1C4E89536906}"/>
               </a:ext>
             </a:extLst>
           </p:cNvPr>
@@ -3992,7 +3992,7 @@
           <p:cNvPr id="15" name="">
             <a:extLst xmlns:a="http://schemas.openxmlformats.org/drawingml/2006/main">
               <a:ext uri="{FF2B5EF4-FFF2-40B4-BE49-F238E27FC236}">
-                <a16:creationId xmlns:a16="http://schemas.microsoft.com/office/drawing/2014/main" id="{B894E92F-A818-47E7-BC1C-67FAA8501EB7}"/>
+                <a16:creationId xmlns:a16="http://schemas.microsoft.com/office/drawing/2014/main" id="{BA2ABEB1-0CC0-41AF-B82A-4E16D25CEF81}"/>
               </a:ext>
             </a:extLst>
           </p:cNvPr>
@@ -4026,7 +4026,7 @@
           <p:cNvPr id="16" name="">
             <a:extLst xmlns:a="http://schemas.openxmlformats.org/drawingml/2006/main">
               <a:ext uri="{FF2B5EF4-FFF2-40B4-BE49-F238E27FC236}">
-                <a16:creationId xmlns:a16="http://schemas.microsoft.com/office/drawing/2014/main" id="{24AEDA9F-73F2-4C58-A1C0-417BABC738F7}"/>
+                <a16:creationId xmlns:a16="http://schemas.microsoft.com/office/drawing/2014/main" id="{AABD461D-79CE-4AF3-9DCA-09DE639AE8CE}"/>
               </a:ext>
             </a:extLst>
           </p:cNvPr>
@@ -4083,7 +4083,7 @@
           <p:cNvPr id="17" name="">
             <a:extLst xmlns:a="http://schemas.openxmlformats.org/drawingml/2006/main">
               <a:ext uri="{FF2B5EF4-FFF2-40B4-BE49-F238E27FC236}">
-                <a16:creationId xmlns:a16="http://schemas.microsoft.com/office/drawing/2014/main" id="{33CDE8C9-8CE5-4B58-94A4-05410404B4B7}"/>
+                <a16:creationId xmlns:a16="http://schemas.microsoft.com/office/drawing/2014/main" id="{091D4AF9-806A-4967-8F85-CB518752AE33}"/>
               </a:ext>
             </a:extLst>
           </p:cNvPr>
@@ -4140,7 +4140,7 @@
           <p:cNvPr id="18" name="">
             <a:extLst xmlns:a="http://schemas.openxmlformats.org/drawingml/2006/main">
               <a:ext uri="{FF2B5EF4-FFF2-40B4-BE49-F238E27FC236}">
-                <a16:creationId xmlns:a16="http://schemas.microsoft.com/office/drawing/2014/main" id="{9B1B3B43-E5FC-4138-94D7-CDF31714AB29}"/>
+                <a16:creationId xmlns:a16="http://schemas.microsoft.com/office/drawing/2014/main" id="{4045A4C4-1C42-4CC3-9C21-74718894B502}"/>
               </a:ext>
             </a:extLst>
           </p:cNvPr>
@@ -4195,7 +4195,7 @@
     </p:spTree>
     <p:extLst>
       <p:ext uri="{BB962C8B-B14F-4D97-AF65-F5344CB8AC3E}">
-        <p14:creationId xmlns:p14="http://schemas.microsoft.com/office/powerpoint/2010/main" val="1955510141"/>
+        <p14:creationId xmlns:p14="http://schemas.microsoft.com/office/powerpoint/2010/main" val="868602972"/>
       </p:ext>
     </p:extLst>
   </p:cSld>
@@ -4350,7 +4350,7 @@
           <p:cNvPr id="23" name="">
             <a:extLst xmlns:a="http://schemas.openxmlformats.org/drawingml/2006/main">
               <a:ext uri="{FF2B5EF4-FFF2-40B4-BE49-F238E27FC236}">
-                <a16:creationId xmlns:a16="http://schemas.microsoft.com/office/drawing/2014/main" id="{DD5225E2-FD51-4414-BB54-0BEF7FF28C8D}"/>
+                <a16:creationId xmlns:a16="http://schemas.microsoft.com/office/drawing/2014/main" id="{3E972C19-6EE6-4B45-A853-968A31D78AA6}"/>
               </a:ext>
             </a:extLst>
           </p:cNvPr>
@@ -4382,7 +4382,7 @@
           <p:cNvPr id="2" name="">
             <a:extLst xmlns:a="http://schemas.openxmlformats.org/drawingml/2006/main">
               <a:ext uri="{FF2B5EF4-FFF2-40B4-BE49-F238E27FC236}">
-                <a16:creationId xmlns:a16="http://schemas.microsoft.com/office/drawing/2014/main" id="{57F1C139-C865-460D-A529-1207DC707851}"/>
+                <a16:creationId xmlns:a16="http://schemas.microsoft.com/office/drawing/2014/main" id="{46772A82-E02B-4768-879F-8B75069981EC}"/>
               </a:ext>
             </a:extLst>
           </p:cNvPr>
@@ -4439,7 +4439,7 @@
           <p:cNvPr id="3" name="">
             <a:extLst xmlns:a="http://schemas.openxmlformats.org/drawingml/2006/main">
               <a:ext uri="{FF2B5EF4-FFF2-40B4-BE49-F238E27FC236}">
-                <a16:creationId xmlns:a16="http://schemas.microsoft.com/office/drawing/2014/main" id="{DE0B5905-5F12-4681-B93D-241DEE68C197}"/>
+                <a16:creationId xmlns:a16="http://schemas.microsoft.com/office/drawing/2014/main" id="{4619848C-B7FC-4FBC-B338-B24EDAAD3BB6}"/>
               </a:ext>
             </a:extLst>
           </p:cNvPr>
@@ -4471,7 +4471,7 @@
           <p:cNvPr id="4" name="">
             <a:extLst xmlns:a="http://schemas.openxmlformats.org/drawingml/2006/main">
               <a:ext uri="{FF2B5EF4-FFF2-40B4-BE49-F238E27FC236}">
-                <a16:creationId xmlns:a16="http://schemas.microsoft.com/office/drawing/2014/main" id="{399C3B18-8C8C-4AB1-8723-1B54FCC310CD}"/>
+                <a16:creationId xmlns:a16="http://schemas.microsoft.com/office/drawing/2014/main" id="{EF9036BF-FC67-4232-A7D3-984E41B79510}"/>
               </a:ext>
             </a:extLst>
           </p:cNvPr>
@@ -4528,7 +4528,7 @@
           <p:cNvPr id="5" name="">
             <a:extLst xmlns:a="http://schemas.openxmlformats.org/drawingml/2006/main">
               <a:ext uri="{FF2B5EF4-FFF2-40B4-BE49-F238E27FC236}">
-                <a16:creationId xmlns:a16="http://schemas.microsoft.com/office/drawing/2014/main" id="{78CC4A94-E229-4641-8749-53E6FC61DC80}"/>
+                <a16:creationId xmlns:a16="http://schemas.microsoft.com/office/drawing/2014/main" id="{119E86CF-9114-452B-9A0C-053EDF3BCCE8}"/>
               </a:ext>
             </a:extLst>
           </p:cNvPr>
@@ -4585,7 +4585,7 @@
           <p:cNvPr id="6" name="">
             <a:extLst xmlns:a="http://schemas.openxmlformats.org/drawingml/2006/main">
               <a:ext uri="{FF2B5EF4-FFF2-40B4-BE49-F238E27FC236}">
-                <a16:creationId xmlns:a16="http://schemas.microsoft.com/office/drawing/2014/main" id="{4F9BB40B-7658-4DD7-89FF-E76D74B947DC}"/>
+                <a16:creationId xmlns:a16="http://schemas.microsoft.com/office/drawing/2014/main" id="{3659B7EE-3A8E-4910-A7BF-AD1B88926F14}"/>
               </a:ext>
             </a:extLst>
           </p:cNvPr>
@@ -4642,7 +4642,7 @@
           <p:cNvPr id="7" name="">
             <a:extLst xmlns:a="http://schemas.openxmlformats.org/drawingml/2006/main">
               <a:ext uri="{FF2B5EF4-FFF2-40B4-BE49-F238E27FC236}">
-                <a16:creationId xmlns:a16="http://schemas.microsoft.com/office/drawing/2014/main" id="{DFA0EBE9-9591-4893-9988-EFDA636CFC27}"/>
+                <a16:creationId xmlns:a16="http://schemas.microsoft.com/office/drawing/2014/main" id="{ADEBA2EE-5EA2-406B-8529-0134180B4E5C}"/>
               </a:ext>
             </a:extLst>
           </p:cNvPr>
@@ -4674,7 +4674,7 @@
           <p:cNvPr id="8" name="">
             <a:extLst xmlns:a="http://schemas.openxmlformats.org/drawingml/2006/main">
               <a:ext uri="{FF2B5EF4-FFF2-40B4-BE49-F238E27FC236}">
-                <a16:creationId xmlns:a16="http://schemas.microsoft.com/office/drawing/2014/main" id="{EAE0DCDE-3B95-49E2-B273-90286559985B}"/>
+                <a16:creationId xmlns:a16="http://schemas.microsoft.com/office/drawing/2014/main" id="{D256EF79-4738-4AAE-8A51-5FC6CECD85D7}"/>
               </a:ext>
             </a:extLst>
           </p:cNvPr>
@@ -4731,7 +4731,7 @@
           <p:cNvPr id="9" name="">
             <a:extLst xmlns:a="http://schemas.openxmlformats.org/drawingml/2006/main">
               <a:ext uri="{FF2B5EF4-FFF2-40B4-BE49-F238E27FC236}">
-                <a16:creationId xmlns:a16="http://schemas.microsoft.com/office/drawing/2014/main" id="{FB9C68A6-76F8-4726-9848-6FC6487B71E2}"/>
+                <a16:creationId xmlns:a16="http://schemas.microsoft.com/office/drawing/2014/main" id="{C43AA0A4-C635-4ECD-B82B-5712D93D6705}"/>
               </a:ext>
             </a:extLst>
           </p:cNvPr>
@@ -4788,7 +4788,7 @@
           <p:cNvPr id="10" name="">
             <a:extLst xmlns:a="http://schemas.openxmlformats.org/drawingml/2006/main">
               <a:ext uri="{FF2B5EF4-FFF2-40B4-BE49-F238E27FC236}">
-                <a16:creationId xmlns:a16="http://schemas.microsoft.com/office/drawing/2014/main" id="{606991A0-4F54-431E-B796-AB5DBF92B9C6}"/>
+                <a16:creationId xmlns:a16="http://schemas.microsoft.com/office/drawing/2014/main" id="{36CA1990-2B5E-4D52-AE5E-280FBD7B32AA}"/>
               </a:ext>
             </a:extLst>
           </p:cNvPr>
@@ -4822,7 +4822,7 @@
           <p:cNvPr id="11" name="">
             <a:extLst xmlns:a="http://schemas.openxmlformats.org/drawingml/2006/main">
               <a:ext uri="{FF2B5EF4-FFF2-40B4-BE49-F238E27FC236}">
-                <a16:creationId xmlns:a16="http://schemas.microsoft.com/office/drawing/2014/main" id="{5946161F-FD18-4097-A8E9-59353161BD46}"/>
+                <a16:creationId xmlns:a16="http://schemas.microsoft.com/office/drawing/2014/main" id="{58494DA3-1959-4482-9B75-20558FC92834}"/>
               </a:ext>
             </a:extLst>
           </p:cNvPr>
@@ -4854,7 +4854,7 @@
           <p:cNvPr id="12" name="">
             <a:extLst xmlns:a="http://schemas.openxmlformats.org/drawingml/2006/main">
               <a:ext uri="{FF2B5EF4-FFF2-40B4-BE49-F238E27FC236}">
-                <a16:creationId xmlns:a16="http://schemas.microsoft.com/office/drawing/2014/main" id="{DF7B352B-F97C-46C3-9E57-78E21099C03B}"/>
+                <a16:creationId xmlns:a16="http://schemas.microsoft.com/office/drawing/2014/main" id="{1E4605C2-8CAD-4F45-99F0-552BDFBD0AC8}"/>
               </a:ext>
             </a:extLst>
           </p:cNvPr>
@@ -4911,7 +4911,7 @@
           <p:cNvPr id="13" name="">
             <a:extLst xmlns:a="http://schemas.openxmlformats.org/drawingml/2006/main">
               <a:ext uri="{FF2B5EF4-FFF2-40B4-BE49-F238E27FC236}">
-                <a16:creationId xmlns:a16="http://schemas.microsoft.com/office/drawing/2014/main" id="{554D0A54-B706-4A39-B4E8-5E04E447983B}"/>
+                <a16:creationId xmlns:a16="http://schemas.microsoft.com/office/drawing/2014/main" id="{664A8A28-66E3-417F-9C20-DCFC0BF1F206}"/>
               </a:ext>
             </a:extLst>
           </p:cNvPr>
@@ -4968,7 +4968,7 @@
           <p:cNvPr id="14" name="">
             <a:extLst xmlns:a="http://schemas.openxmlformats.org/drawingml/2006/main">
               <a:ext uri="{FF2B5EF4-FFF2-40B4-BE49-F238E27FC236}">
-                <a16:creationId xmlns:a16="http://schemas.microsoft.com/office/drawing/2014/main" id="{2A4BE2F7-5D76-4052-BF44-F764EB1F2570}"/>
+                <a16:creationId xmlns:a16="http://schemas.microsoft.com/office/drawing/2014/main" id="{274F4181-9E5B-4771-9A81-5AE395B52479}"/>
               </a:ext>
             </a:extLst>
           </p:cNvPr>
@@ -5002,7 +5002,7 @@
           <p:cNvPr id="15" name="">
             <a:extLst xmlns:a="http://schemas.openxmlformats.org/drawingml/2006/main">
               <a:ext uri="{FF2B5EF4-FFF2-40B4-BE49-F238E27FC236}">
-                <a16:creationId xmlns:a16="http://schemas.microsoft.com/office/drawing/2014/main" id="{BA56929F-E1AA-4BAA-A69D-0853C333DF15}"/>
+                <a16:creationId xmlns:a16="http://schemas.microsoft.com/office/drawing/2014/main" id="{8FAA6666-E79F-41E6-80B3-7FE2802C66CD}"/>
               </a:ext>
             </a:extLst>
           </p:cNvPr>
@@ -5034,7 +5034,7 @@
           <p:cNvPr id="16" name="">
             <a:extLst xmlns:a="http://schemas.openxmlformats.org/drawingml/2006/main">
               <a:ext uri="{FF2B5EF4-FFF2-40B4-BE49-F238E27FC236}">
-                <a16:creationId xmlns:a16="http://schemas.microsoft.com/office/drawing/2014/main" id="{DBE60F45-C439-4164-8259-296563DF057C}"/>
+                <a16:creationId xmlns:a16="http://schemas.microsoft.com/office/drawing/2014/main" id="{8D0C51F2-6FF4-488C-8207-C353E365F856}"/>
               </a:ext>
             </a:extLst>
           </p:cNvPr>
@@ -5091,7 +5091,7 @@
           <p:cNvPr id="17" name="">
             <a:extLst xmlns:a="http://schemas.openxmlformats.org/drawingml/2006/main">
               <a:ext uri="{FF2B5EF4-FFF2-40B4-BE49-F238E27FC236}">
-                <a16:creationId xmlns:a16="http://schemas.microsoft.com/office/drawing/2014/main" id="{EB20EE5E-95BC-431F-9490-A8B66274D3BA}"/>
+                <a16:creationId xmlns:a16="http://schemas.microsoft.com/office/drawing/2014/main" id="{5F30CFF2-A049-4E4D-99B6-42616C6FDE3F}"/>
               </a:ext>
             </a:extLst>
           </p:cNvPr>
@@ -5148,7 +5148,7 @@
           <p:cNvPr id="18" name="">
             <a:extLst xmlns:a="http://schemas.openxmlformats.org/drawingml/2006/main">
               <a:ext uri="{FF2B5EF4-FFF2-40B4-BE49-F238E27FC236}">
-                <a16:creationId xmlns:a16="http://schemas.microsoft.com/office/drawing/2014/main" id="{9B16D27C-227E-4773-9687-C651B65ABE21}"/>
+                <a16:creationId xmlns:a16="http://schemas.microsoft.com/office/drawing/2014/main" id="{31008686-D6D1-4FFE-9D9F-CB0B748F7A50}"/>
               </a:ext>
             </a:extLst>
           </p:cNvPr>
@@ -5182,7 +5182,7 @@
           <p:cNvPr id="19" name="">
             <a:extLst xmlns:a="http://schemas.openxmlformats.org/drawingml/2006/main">
               <a:ext uri="{FF2B5EF4-FFF2-40B4-BE49-F238E27FC236}">
-                <a16:creationId xmlns:a16="http://schemas.microsoft.com/office/drawing/2014/main" id="{E0CA12C1-D0C5-43D8-B9DA-507B93F3CC39}"/>
+                <a16:creationId xmlns:a16="http://schemas.microsoft.com/office/drawing/2014/main" id="{6FA00532-514B-4F39-97EB-131AA2DDAF1A}"/>
               </a:ext>
             </a:extLst>
           </p:cNvPr>
@@ -5214,7 +5214,7 @@
           <p:cNvPr id="20" name="">
             <a:extLst xmlns:a="http://schemas.openxmlformats.org/drawingml/2006/main">
               <a:ext uri="{FF2B5EF4-FFF2-40B4-BE49-F238E27FC236}">
-                <a16:creationId xmlns:a16="http://schemas.microsoft.com/office/drawing/2014/main" id="{96B44A4F-D623-429E-8CAF-FE6057D41F33}"/>
+                <a16:creationId xmlns:a16="http://schemas.microsoft.com/office/drawing/2014/main" id="{68361514-D53B-45AC-A598-02266FC6E477}"/>
               </a:ext>
             </a:extLst>
           </p:cNvPr>
@@ -5271,7 +5271,7 @@
           <p:cNvPr id="21" name="">
             <a:extLst xmlns:a="http://schemas.openxmlformats.org/drawingml/2006/main">
               <a:ext uri="{FF2B5EF4-FFF2-40B4-BE49-F238E27FC236}">
-                <a16:creationId xmlns:a16="http://schemas.microsoft.com/office/drawing/2014/main" id="{BFA8CAE3-355F-4C38-A3B1-C14E0D267B00}"/>
+                <a16:creationId xmlns:a16="http://schemas.microsoft.com/office/drawing/2014/main" id="{CFDF5652-5CC4-4264-ABA4-8BF3713D1078}"/>
               </a:ext>
             </a:extLst>
           </p:cNvPr>
@@ -5328,7 +5328,7 @@
           <p:cNvPr id="22" name="">
             <a:extLst xmlns:a="http://schemas.openxmlformats.org/drawingml/2006/main">
               <a:ext uri="{FF2B5EF4-FFF2-40B4-BE49-F238E27FC236}">
-                <a16:creationId xmlns:a16="http://schemas.microsoft.com/office/drawing/2014/main" id="{E9A55A84-9E8F-4142-A7DB-2F0F31A03C21}"/>
+                <a16:creationId xmlns:a16="http://schemas.microsoft.com/office/drawing/2014/main" id="{749FA7AF-742C-4B44-B3C4-F4C22BAE8DA0}"/>
               </a:ext>
             </a:extLst>
           </p:cNvPr>
@@ -5383,7 +5383,7 @@
     </p:spTree>
     <p:extLst>
       <p:ext uri="{BB962C8B-B14F-4D97-AF65-F5344CB8AC3E}">
-        <p14:creationId xmlns:p14="http://schemas.microsoft.com/office/powerpoint/2010/main" val="969230091"/>
+        <p14:creationId xmlns:p14="http://schemas.microsoft.com/office/powerpoint/2010/main" val="1515192550"/>
       </p:ext>
     </p:extLst>
   </p:cSld>
@@ -5584,7 +5584,7 @@
           <p:cNvPr id="23" name="">
             <a:extLst xmlns:a="http://schemas.openxmlformats.org/drawingml/2006/main">
               <a:ext uri="{FF2B5EF4-FFF2-40B4-BE49-F238E27FC236}">
-                <a16:creationId xmlns:a16="http://schemas.microsoft.com/office/drawing/2014/main" id="{20CC5DC5-00F2-4FB6-9F19-0E5F78E7D91D}"/>
+                <a16:creationId xmlns:a16="http://schemas.microsoft.com/office/drawing/2014/main" id="{D7492D65-9FE6-425F-B61C-50B80BDADA62}"/>
               </a:ext>
             </a:extLst>
           </p:cNvPr>
@@ -5616,7 +5616,7 @@
           <p:cNvPr id="2" name="">
             <a:extLst xmlns:a="http://schemas.openxmlformats.org/drawingml/2006/main">
               <a:ext uri="{FF2B5EF4-FFF2-40B4-BE49-F238E27FC236}">
-                <a16:creationId xmlns:a16="http://schemas.microsoft.com/office/drawing/2014/main" id="{0B9F559D-7D50-410A-A26B-33822525BA1A}"/>
+                <a16:creationId xmlns:a16="http://schemas.microsoft.com/office/drawing/2014/main" id="{EA6DC21A-839D-476B-8C4D-FF585E42EBCC}"/>
               </a:ext>
             </a:extLst>
           </p:cNvPr>
@@ -5673,7 +5673,7 @@
           <p:cNvPr id="3" name="">
             <a:extLst xmlns:a="http://schemas.openxmlformats.org/drawingml/2006/main">
               <a:ext uri="{FF2B5EF4-FFF2-40B4-BE49-F238E27FC236}">
-                <a16:creationId xmlns:a16="http://schemas.microsoft.com/office/drawing/2014/main" id="{271B2BA5-1875-4978-A78E-89E45038ADE3}"/>
+                <a16:creationId xmlns:a16="http://schemas.microsoft.com/office/drawing/2014/main" id="{3DE08D82-BB9E-487F-AC20-C0DCE4C2C09D}"/>
               </a:ext>
             </a:extLst>
           </p:cNvPr>
@@ -5705,7 +5705,7 @@
           <p:cNvPr id="4" name="">
             <a:extLst xmlns:a="http://schemas.openxmlformats.org/drawingml/2006/main">
               <a:ext uri="{FF2B5EF4-FFF2-40B4-BE49-F238E27FC236}">
-                <a16:creationId xmlns:a16="http://schemas.microsoft.com/office/drawing/2014/main" id="{70E8F88C-AACE-4C66-84A8-33FECF4EA7F6}"/>
+                <a16:creationId xmlns:a16="http://schemas.microsoft.com/office/drawing/2014/main" id="{32AA2175-FA0D-4D71-824A-142193C4C81E}"/>
               </a:ext>
             </a:extLst>
           </p:cNvPr>
@@ -5762,7 +5762,7 @@
           <p:cNvPr id="5" name="">
             <a:extLst xmlns:a="http://schemas.openxmlformats.org/drawingml/2006/main">
               <a:ext uri="{FF2B5EF4-FFF2-40B4-BE49-F238E27FC236}">
-                <a16:creationId xmlns:a16="http://schemas.microsoft.com/office/drawing/2014/main" id="{F62ED3AB-3115-4F52-AFBB-FE57C27411B5}"/>
+                <a16:creationId xmlns:a16="http://schemas.microsoft.com/office/drawing/2014/main" id="{2812F8CA-4DE3-4033-9C1C-D0C6DD6FE976}"/>
               </a:ext>
             </a:extLst>
           </p:cNvPr>
@@ -5819,7 +5819,7 @@
           <p:cNvPr id="6" name="">
             <a:extLst xmlns:a="http://schemas.openxmlformats.org/drawingml/2006/main">
               <a:ext uri="{FF2B5EF4-FFF2-40B4-BE49-F238E27FC236}">
-                <a16:creationId xmlns:a16="http://schemas.microsoft.com/office/drawing/2014/main" id="{6C415C72-1D5C-4054-8AFA-164C4EF5DA32}"/>
+                <a16:creationId xmlns:a16="http://schemas.microsoft.com/office/drawing/2014/main" id="{8D54904D-17D5-4F33-958A-94FF7795F171}"/>
               </a:ext>
             </a:extLst>
           </p:cNvPr>
@@ -5876,7 +5876,7 @@
           <p:cNvPr id="7" name="">
             <a:extLst xmlns:a="http://schemas.openxmlformats.org/drawingml/2006/main">
               <a:ext uri="{FF2B5EF4-FFF2-40B4-BE49-F238E27FC236}">
-                <a16:creationId xmlns:a16="http://schemas.microsoft.com/office/drawing/2014/main" id="{66358F51-9CA5-44BE-B9B3-0B5F4D8563F3}"/>
+                <a16:creationId xmlns:a16="http://schemas.microsoft.com/office/drawing/2014/main" id="{3B760002-394D-4A32-B052-23B6D4424C9A}"/>
               </a:ext>
             </a:extLst>
           </p:cNvPr>
@@ -5908,7 +5908,7 @@
           <p:cNvPr id="8" name="">
             <a:extLst xmlns:a="http://schemas.openxmlformats.org/drawingml/2006/main">
               <a:ext uri="{FF2B5EF4-FFF2-40B4-BE49-F238E27FC236}">
-                <a16:creationId xmlns:a16="http://schemas.microsoft.com/office/drawing/2014/main" id="{81C5CA7D-5C43-454E-A0AA-94EA8B834228}"/>
+                <a16:creationId xmlns:a16="http://schemas.microsoft.com/office/drawing/2014/main" id="{94688695-1018-406B-8098-8AF5A96D5A6E}"/>
               </a:ext>
             </a:extLst>
           </p:cNvPr>
@@ -5965,7 +5965,7 @@
           <p:cNvPr id="9" name="">
             <a:extLst xmlns:a="http://schemas.openxmlformats.org/drawingml/2006/main">
               <a:ext uri="{FF2B5EF4-FFF2-40B4-BE49-F238E27FC236}">
-                <a16:creationId xmlns:a16="http://schemas.microsoft.com/office/drawing/2014/main" id="{FB3067E7-43D2-4AA9-B56A-668C5A72EA1E}"/>
+                <a16:creationId xmlns:a16="http://schemas.microsoft.com/office/drawing/2014/main" id="{7BC1BEBD-157A-4082-902F-0A113F238194}"/>
               </a:ext>
             </a:extLst>
           </p:cNvPr>
@@ -6022,7 +6022,7 @@
           <p:cNvPr id="10" name="">
             <a:extLst xmlns:a="http://schemas.openxmlformats.org/drawingml/2006/main">
               <a:ext uri="{FF2B5EF4-FFF2-40B4-BE49-F238E27FC236}">
-                <a16:creationId xmlns:a16="http://schemas.microsoft.com/office/drawing/2014/main" id="{1A1088AA-36D3-4495-90E5-BF005546E2D6}"/>
+                <a16:creationId xmlns:a16="http://schemas.microsoft.com/office/drawing/2014/main" id="{D9A06A39-4C1D-4889-9EB3-D707AF48B37D}"/>
               </a:ext>
             </a:extLst>
           </p:cNvPr>
@@ -6056,7 +6056,7 @@
           <p:cNvPr id="11" name="">
             <a:extLst xmlns:a="http://schemas.openxmlformats.org/drawingml/2006/main">
               <a:ext uri="{FF2B5EF4-FFF2-40B4-BE49-F238E27FC236}">
-                <a16:creationId xmlns:a16="http://schemas.microsoft.com/office/drawing/2014/main" id="{67F06DBF-32EE-4CDB-B8CC-2E223270BF63}"/>
+                <a16:creationId xmlns:a16="http://schemas.microsoft.com/office/drawing/2014/main" id="{CAD36ADA-6B46-4D04-8ADC-45111CAB9C1E}"/>
               </a:ext>
             </a:extLst>
           </p:cNvPr>
@@ -6088,7 +6088,7 @@
           <p:cNvPr id="12" name="">
             <a:extLst xmlns:a="http://schemas.openxmlformats.org/drawingml/2006/main">
               <a:ext uri="{FF2B5EF4-FFF2-40B4-BE49-F238E27FC236}">
-                <a16:creationId xmlns:a16="http://schemas.microsoft.com/office/drawing/2014/main" id="{816E30CF-BAAC-4BA9-A0F3-0328D0B2E2A1}"/>
+                <a16:creationId xmlns:a16="http://schemas.microsoft.com/office/drawing/2014/main" id="{B86A87D5-C64E-443C-BAB5-9B396F16040C}"/>
               </a:ext>
             </a:extLst>
           </p:cNvPr>
@@ -6145,7 +6145,7 @@
           <p:cNvPr id="13" name="">
             <a:extLst xmlns:a="http://schemas.openxmlformats.org/drawingml/2006/main">
               <a:ext uri="{FF2B5EF4-FFF2-40B4-BE49-F238E27FC236}">
-                <a16:creationId xmlns:a16="http://schemas.microsoft.com/office/drawing/2014/main" id="{E1C0F363-8DC9-495E-A579-E5E419742061}"/>
+                <a16:creationId xmlns:a16="http://schemas.microsoft.com/office/drawing/2014/main" id="{49977FE4-F964-4DCA-A65C-05721B68CCC1}"/>
               </a:ext>
             </a:extLst>
           </p:cNvPr>
@@ -6202,7 +6202,7 @@
           <p:cNvPr id="14" name="">
             <a:extLst xmlns:a="http://schemas.openxmlformats.org/drawingml/2006/main">
               <a:ext uri="{FF2B5EF4-FFF2-40B4-BE49-F238E27FC236}">
-                <a16:creationId xmlns:a16="http://schemas.microsoft.com/office/drawing/2014/main" id="{BF4E48E5-B8BF-4C7C-B433-B18ED01E3FEB}"/>
+                <a16:creationId xmlns:a16="http://schemas.microsoft.com/office/drawing/2014/main" id="{F511EFF0-2B78-435F-A799-F31710B80EF8}"/>
               </a:ext>
             </a:extLst>
           </p:cNvPr>
@@ -6236,7 +6236,7 @@
           <p:cNvPr id="15" name="">
             <a:extLst xmlns:a="http://schemas.openxmlformats.org/drawingml/2006/main">
               <a:ext uri="{FF2B5EF4-FFF2-40B4-BE49-F238E27FC236}">
-                <a16:creationId xmlns:a16="http://schemas.microsoft.com/office/drawing/2014/main" id="{23C92F78-BDB1-4D75-9658-F9A1BACFCD74}"/>
+                <a16:creationId xmlns:a16="http://schemas.microsoft.com/office/drawing/2014/main" id="{5880BFBA-3866-468D-AC5F-74B566B6A2F6}"/>
               </a:ext>
             </a:extLst>
           </p:cNvPr>
@@ -6268,7 +6268,7 @@
           <p:cNvPr id="16" name="">
             <a:extLst xmlns:a="http://schemas.openxmlformats.org/drawingml/2006/main">
               <a:ext uri="{FF2B5EF4-FFF2-40B4-BE49-F238E27FC236}">
-                <a16:creationId xmlns:a16="http://schemas.microsoft.com/office/drawing/2014/main" id="{0FAA8709-53EE-4426-A40B-DF19FE11AEAC}"/>
+                <a16:creationId xmlns:a16="http://schemas.microsoft.com/office/drawing/2014/main" id="{AEEEC2AB-8312-49E8-A444-EA08F23E28C1}"/>
               </a:ext>
             </a:extLst>
           </p:cNvPr>
@@ -6325,7 +6325,7 @@
           <p:cNvPr id="17" name="">
             <a:extLst xmlns:a="http://schemas.openxmlformats.org/drawingml/2006/main">
               <a:ext uri="{FF2B5EF4-FFF2-40B4-BE49-F238E27FC236}">
-                <a16:creationId xmlns:a16="http://schemas.microsoft.com/office/drawing/2014/main" id="{30E36AA5-37EA-447E-9B5F-01777A0FD2FF}"/>
+                <a16:creationId xmlns:a16="http://schemas.microsoft.com/office/drawing/2014/main" id="{205EAA55-E7F5-4E42-BC54-F0C8F0A69244}"/>
               </a:ext>
             </a:extLst>
           </p:cNvPr>
@@ -6382,7 +6382,7 @@
           <p:cNvPr id="18" name="">
             <a:extLst xmlns:a="http://schemas.openxmlformats.org/drawingml/2006/main">
               <a:ext uri="{FF2B5EF4-FFF2-40B4-BE49-F238E27FC236}">
-                <a16:creationId xmlns:a16="http://schemas.microsoft.com/office/drawing/2014/main" id="{74424CBE-8D10-4EF2-B345-F2CCAF0A0D15}"/>
+                <a16:creationId xmlns:a16="http://schemas.microsoft.com/office/drawing/2014/main" id="{E155C293-F0AC-4BA9-8F42-AA191C05EBD1}"/>
               </a:ext>
             </a:extLst>
           </p:cNvPr>
@@ -6416,7 +6416,7 @@
           <p:cNvPr id="19" name="">
             <a:extLst xmlns:a="http://schemas.openxmlformats.org/drawingml/2006/main">
               <a:ext uri="{FF2B5EF4-FFF2-40B4-BE49-F238E27FC236}">
-                <a16:creationId xmlns:a16="http://schemas.microsoft.com/office/drawing/2014/main" id="{A51808CE-468E-47EA-A593-8261B86072AB}"/>
+                <a16:creationId xmlns:a16="http://schemas.microsoft.com/office/drawing/2014/main" id="{ADBBE891-8399-4C50-B87A-4568987A7D82}"/>
               </a:ext>
             </a:extLst>
           </p:cNvPr>
@@ -6448,7 +6448,7 @@
           <p:cNvPr id="20" name="">
             <a:extLst xmlns:a="http://schemas.openxmlformats.org/drawingml/2006/main">
               <a:ext uri="{FF2B5EF4-FFF2-40B4-BE49-F238E27FC236}">
-                <a16:creationId xmlns:a16="http://schemas.microsoft.com/office/drawing/2014/main" id="{5644DC17-A4A9-4806-92B2-0FEE454D1EA2}"/>
+                <a16:creationId xmlns:a16="http://schemas.microsoft.com/office/drawing/2014/main" id="{E913526F-2157-4F32-BCF2-C1490457E455}"/>
               </a:ext>
             </a:extLst>
           </p:cNvPr>
@@ -6505,7 +6505,7 @@
           <p:cNvPr id="21" name="">
             <a:extLst xmlns:a="http://schemas.openxmlformats.org/drawingml/2006/main">
               <a:ext uri="{FF2B5EF4-FFF2-40B4-BE49-F238E27FC236}">
-                <a16:creationId xmlns:a16="http://schemas.microsoft.com/office/drawing/2014/main" id="{2484E88B-66BC-4AC1-8572-12A1103B55CE}"/>
+                <a16:creationId xmlns:a16="http://schemas.microsoft.com/office/drawing/2014/main" id="{35D9148B-10D5-4C27-B280-97FAA02B20A7}"/>
               </a:ext>
             </a:extLst>
           </p:cNvPr>
@@ -6562,7 +6562,7 @@
           <p:cNvPr id="22" name="">
             <a:extLst xmlns:a="http://schemas.openxmlformats.org/drawingml/2006/main">
               <a:ext uri="{FF2B5EF4-FFF2-40B4-BE49-F238E27FC236}">
-                <a16:creationId xmlns:a16="http://schemas.microsoft.com/office/drawing/2014/main" id="{C0FA406D-70D6-484E-8D3D-90D4F4597FD1}"/>
+                <a16:creationId xmlns:a16="http://schemas.microsoft.com/office/drawing/2014/main" id="{7647BBE3-5A25-4275-B1DE-AA790CF2F371}"/>
               </a:ext>
             </a:extLst>
           </p:cNvPr>
@@ -6617,7 +6617,7 @@
     </p:spTree>
     <p:extLst>
       <p:ext uri="{BB962C8B-B14F-4D97-AF65-F5344CB8AC3E}">
-        <p14:creationId xmlns:p14="http://schemas.microsoft.com/office/powerpoint/2010/main" val="1544533955"/>
+        <p14:creationId xmlns:p14="http://schemas.microsoft.com/office/powerpoint/2010/main" val="714037104"/>
       </p:ext>
     </p:extLst>
   </p:cSld>
@@ -6818,7 +6818,7 @@
           <p:cNvPr id="16" name="">
             <a:extLst xmlns:a="http://schemas.openxmlformats.org/drawingml/2006/main">
               <a:ext uri="{FF2B5EF4-FFF2-40B4-BE49-F238E27FC236}">
-                <a16:creationId xmlns:a16="http://schemas.microsoft.com/office/drawing/2014/main" id="{DB28E23E-0E3E-448A-83EA-7CD678907A66}"/>
+                <a16:creationId xmlns:a16="http://schemas.microsoft.com/office/drawing/2014/main" id="{D801FA3C-E999-4205-A88B-B759BBB2B7CF}"/>
               </a:ext>
             </a:extLst>
           </p:cNvPr>
@@ -6850,7 +6850,7 @@
           <p:cNvPr id="2" name="">
             <a:extLst xmlns:a="http://schemas.openxmlformats.org/drawingml/2006/main">
               <a:ext uri="{FF2B5EF4-FFF2-40B4-BE49-F238E27FC236}">
-                <a16:creationId xmlns:a16="http://schemas.microsoft.com/office/drawing/2014/main" id="{8A5777D5-99CA-42EF-89CF-DBA22A659A16}"/>
+                <a16:creationId xmlns:a16="http://schemas.microsoft.com/office/drawing/2014/main" id="{D90DB31C-78C6-41E8-B4D9-E2B7645F69C3}"/>
               </a:ext>
             </a:extLst>
           </p:cNvPr>
@@ -6907,7 +6907,7 @@
           <p:cNvPr id="3" name="">
             <a:extLst xmlns:a="http://schemas.openxmlformats.org/drawingml/2006/main">
               <a:ext uri="{FF2B5EF4-FFF2-40B4-BE49-F238E27FC236}">
-                <a16:creationId xmlns:a16="http://schemas.microsoft.com/office/drawing/2014/main" id="{7FF17FBA-2EC1-4D66-A336-C24D99E885C7}"/>
+                <a16:creationId xmlns:a16="http://schemas.microsoft.com/office/drawing/2014/main" id="{C8BDB830-0050-4D68-A1FF-F4F905A2881C}"/>
               </a:ext>
             </a:extLst>
           </p:cNvPr>
@@ -6939,7 +6939,7 @@
           <p:cNvPr id="4" name="">
             <a:extLst xmlns:a="http://schemas.openxmlformats.org/drawingml/2006/main">
               <a:ext uri="{FF2B5EF4-FFF2-40B4-BE49-F238E27FC236}">
-                <a16:creationId xmlns:a16="http://schemas.microsoft.com/office/drawing/2014/main" id="{1F67153B-6DCE-405D-BDA5-5DE278A6B65A}"/>
+                <a16:creationId xmlns:a16="http://schemas.microsoft.com/office/drawing/2014/main" id="{BC034DE7-380E-4429-ABCF-CA37B7BF0ABF}"/>
               </a:ext>
             </a:extLst>
           </p:cNvPr>
@@ -6996,7 +6996,7 @@
           <p:cNvPr id="5" name="">
             <a:extLst xmlns:a="http://schemas.openxmlformats.org/drawingml/2006/main">
               <a:ext uri="{FF2B5EF4-FFF2-40B4-BE49-F238E27FC236}">
-                <a16:creationId xmlns:a16="http://schemas.microsoft.com/office/drawing/2014/main" id="{D7105616-B46F-495F-B5F0-C13DBC1FEB31}"/>
+                <a16:creationId xmlns:a16="http://schemas.microsoft.com/office/drawing/2014/main" id="{2DD68D43-D48C-4D25-B65E-E2EDFF46F9E7}"/>
               </a:ext>
             </a:extLst>
           </p:cNvPr>
@@ -7053,7 +7053,7 @@
           <p:cNvPr id="6" name="">
             <a:extLst xmlns:a="http://schemas.openxmlformats.org/drawingml/2006/main">
               <a:ext uri="{FF2B5EF4-FFF2-40B4-BE49-F238E27FC236}">
-                <a16:creationId xmlns:a16="http://schemas.microsoft.com/office/drawing/2014/main" id="{FEFDC60B-2EC4-47FE-A920-B74BB41F5AC5}"/>
+                <a16:creationId xmlns:a16="http://schemas.microsoft.com/office/drawing/2014/main" id="{0B93D92E-9BE4-4681-8951-B41E59E8DDC5}"/>
               </a:ext>
             </a:extLst>
           </p:cNvPr>
@@ -7110,7 +7110,7 @@
           <p:cNvPr id="7" name="">
             <a:extLst xmlns:a="http://schemas.openxmlformats.org/drawingml/2006/main">
               <a:ext uri="{FF2B5EF4-FFF2-40B4-BE49-F238E27FC236}">
-                <a16:creationId xmlns:a16="http://schemas.microsoft.com/office/drawing/2014/main" id="{A4EBBF53-821F-4DEE-8E06-82FFB2EF475B}"/>
+                <a16:creationId xmlns:a16="http://schemas.microsoft.com/office/drawing/2014/main" id="{7FF47A06-656E-45B3-940F-8A903B1D0651}"/>
               </a:ext>
             </a:extLst>
           </p:cNvPr>
@@ -7142,7 +7142,7 @@
           <p:cNvPr id="8" name="">
             <a:extLst xmlns:a="http://schemas.openxmlformats.org/drawingml/2006/main">
               <a:ext uri="{FF2B5EF4-FFF2-40B4-BE49-F238E27FC236}">
-                <a16:creationId xmlns:a16="http://schemas.microsoft.com/office/drawing/2014/main" id="{9071831E-77B6-438B-B79F-B12060D3FE90}"/>
+                <a16:creationId xmlns:a16="http://schemas.microsoft.com/office/drawing/2014/main" id="{980467A1-BBA1-4CC1-AA48-DA0AF920719D}"/>
               </a:ext>
             </a:extLst>
           </p:cNvPr>
@@ -7199,7 +7199,7 @@
           <p:cNvPr id="9" name="">
             <a:extLst xmlns:a="http://schemas.openxmlformats.org/drawingml/2006/main">
               <a:ext uri="{FF2B5EF4-FFF2-40B4-BE49-F238E27FC236}">
-                <a16:creationId xmlns:a16="http://schemas.microsoft.com/office/drawing/2014/main" id="{6EC1FC14-3ED2-47E5-A5A7-57623825BE28}"/>
+                <a16:creationId xmlns:a16="http://schemas.microsoft.com/office/drawing/2014/main" id="{B8CB2112-B72E-4E9D-A87F-9A788B084B1A}"/>
               </a:ext>
             </a:extLst>
           </p:cNvPr>
@@ -7256,7 +7256,7 @@
           <p:cNvPr id="10" name="">
             <a:extLst xmlns:a="http://schemas.openxmlformats.org/drawingml/2006/main">
               <a:ext uri="{FF2B5EF4-FFF2-40B4-BE49-F238E27FC236}">
-                <a16:creationId xmlns:a16="http://schemas.microsoft.com/office/drawing/2014/main" id="{281E6C4D-3E50-47B6-8F8B-AD34FD2FE977}"/>
+                <a16:creationId xmlns:a16="http://schemas.microsoft.com/office/drawing/2014/main" id="{17994B60-DDEA-44E3-9606-290EF07BB67E}"/>
               </a:ext>
             </a:extLst>
           </p:cNvPr>
@@ -7313,7 +7313,7 @@
           <p:cNvPr id="11" name="">
             <a:extLst xmlns:a="http://schemas.openxmlformats.org/drawingml/2006/main">
               <a:ext uri="{FF2B5EF4-FFF2-40B4-BE49-F238E27FC236}">
-                <a16:creationId xmlns:a16="http://schemas.microsoft.com/office/drawing/2014/main" id="{97104641-54B4-4E24-AD51-98BF0099AEF9}"/>
+                <a16:creationId xmlns:a16="http://schemas.microsoft.com/office/drawing/2014/main" id="{6DBA58BB-D396-4BBF-B8F9-7990DF729DDA}"/>
               </a:ext>
             </a:extLst>
           </p:cNvPr>
@@ -7345,7 +7345,7 @@
           <p:cNvPr id="12" name="">
             <a:extLst xmlns:a="http://schemas.openxmlformats.org/drawingml/2006/main">
               <a:ext uri="{FF2B5EF4-FFF2-40B4-BE49-F238E27FC236}">
-                <a16:creationId xmlns:a16="http://schemas.microsoft.com/office/drawing/2014/main" id="{07C91489-2EE1-4392-9F1B-A711F92F0D66}"/>
+                <a16:creationId xmlns:a16="http://schemas.microsoft.com/office/drawing/2014/main" id="{BD4E72E2-6D92-412A-B077-D7F71B2D9ECB}"/>
               </a:ext>
             </a:extLst>
           </p:cNvPr>
@@ -7402,7 +7402,7 @@
           <p:cNvPr id="13" name="">
             <a:extLst xmlns:a="http://schemas.openxmlformats.org/drawingml/2006/main">
               <a:ext uri="{FF2B5EF4-FFF2-40B4-BE49-F238E27FC236}">
-                <a16:creationId xmlns:a16="http://schemas.microsoft.com/office/drawing/2014/main" id="{D678D768-EB33-452D-9C86-47F189E29B8A}"/>
+                <a16:creationId xmlns:a16="http://schemas.microsoft.com/office/drawing/2014/main" id="{B3CBCF21-FE4B-447A-9CBB-C48BD2701EE1}"/>
               </a:ext>
             </a:extLst>
           </p:cNvPr>
@@ -7459,7 +7459,7 @@
           <p:cNvPr id="14" name="">
             <a:extLst xmlns:a="http://schemas.openxmlformats.org/drawingml/2006/main">
               <a:ext uri="{FF2B5EF4-FFF2-40B4-BE49-F238E27FC236}">
-                <a16:creationId xmlns:a16="http://schemas.microsoft.com/office/drawing/2014/main" id="{F8105268-8D1E-4272-A49D-F057D6317B1B}"/>
+                <a16:creationId xmlns:a16="http://schemas.microsoft.com/office/drawing/2014/main" id="{C7321679-1DFE-4AD5-8317-D8FC9CD35F48}"/>
               </a:ext>
             </a:extLst>
           </p:cNvPr>
@@ -7516,7 +7516,7 @@
           <p:cNvPr id="15" name="">
             <a:extLst xmlns:a="http://schemas.openxmlformats.org/drawingml/2006/main">
               <a:ext uri="{FF2B5EF4-FFF2-40B4-BE49-F238E27FC236}">
-                <a16:creationId xmlns:a16="http://schemas.microsoft.com/office/drawing/2014/main" id="{EFC8D491-37D0-4398-8106-F83B2E6F5369}"/>
+                <a16:creationId xmlns:a16="http://schemas.microsoft.com/office/drawing/2014/main" id="{13289194-371C-48EC-A2C4-1C96353114E2}"/>
               </a:ext>
             </a:extLst>
           </p:cNvPr>
@@ -7571,7 +7571,7 @@
     </p:spTree>
     <p:extLst>
       <p:ext uri="{BB962C8B-B14F-4D97-AF65-F5344CB8AC3E}">
-        <p14:creationId xmlns:p14="http://schemas.microsoft.com/office/powerpoint/2010/main" val="466482201"/>
+        <p14:creationId xmlns:p14="http://schemas.microsoft.com/office/powerpoint/2010/main" val="1544847215"/>
       </p:ext>
     </p:extLst>
   </p:cSld>
@@ -7772,7 +7772,7 @@
           <p:cNvPr id="23" name="">
             <a:extLst xmlns:a="http://schemas.openxmlformats.org/drawingml/2006/main">
               <a:ext uri="{FF2B5EF4-FFF2-40B4-BE49-F238E27FC236}">
-                <a16:creationId xmlns:a16="http://schemas.microsoft.com/office/drawing/2014/main" id="{4FD72DDC-1CEE-46C7-8BF3-1F2515827653}"/>
+                <a16:creationId xmlns:a16="http://schemas.microsoft.com/office/drawing/2014/main" id="{06B9579D-A914-4800-957C-03E11890F0CA}"/>
               </a:ext>
             </a:extLst>
           </p:cNvPr>
@@ -7804,7 +7804,7 @@
           <p:cNvPr id="2" name="">
             <a:extLst xmlns:a="http://schemas.openxmlformats.org/drawingml/2006/main">
               <a:ext uri="{FF2B5EF4-FFF2-40B4-BE49-F238E27FC236}">
-                <a16:creationId xmlns:a16="http://schemas.microsoft.com/office/drawing/2014/main" id="{79F6065D-D749-4B34-93C6-B83878F5EC99}"/>
+                <a16:creationId xmlns:a16="http://schemas.microsoft.com/office/drawing/2014/main" id="{49741264-1BE2-411F-875B-2820FADD74C1}"/>
               </a:ext>
             </a:extLst>
           </p:cNvPr>
@@ -7861,7 +7861,7 @@
           <p:cNvPr id="3" name="">
             <a:extLst xmlns:a="http://schemas.openxmlformats.org/drawingml/2006/main">
               <a:ext uri="{FF2B5EF4-FFF2-40B4-BE49-F238E27FC236}">
-                <a16:creationId xmlns:a16="http://schemas.microsoft.com/office/drawing/2014/main" id="{26EF31F4-EBB7-4D61-A0AE-1A6BC808E3E9}"/>
+                <a16:creationId xmlns:a16="http://schemas.microsoft.com/office/drawing/2014/main" id="{14E7AA06-43E4-4257-848F-6BEEBD5BC386}"/>
               </a:ext>
             </a:extLst>
           </p:cNvPr>
@@ -7893,7 +7893,7 @@
           <p:cNvPr id="4" name="">
             <a:extLst xmlns:a="http://schemas.openxmlformats.org/drawingml/2006/main">
               <a:ext uri="{FF2B5EF4-FFF2-40B4-BE49-F238E27FC236}">
-                <a16:creationId xmlns:a16="http://schemas.microsoft.com/office/drawing/2014/main" id="{672B4277-5F3C-42E0-8372-DFDB5AD7E6E4}"/>
+                <a16:creationId xmlns:a16="http://schemas.microsoft.com/office/drawing/2014/main" id="{FA07530F-BD16-4E50-80A1-FB60FF72D564}"/>
               </a:ext>
             </a:extLst>
           </p:cNvPr>
@@ -7950,7 +7950,7 @@
           <p:cNvPr id="5" name="">
             <a:extLst xmlns:a="http://schemas.openxmlformats.org/drawingml/2006/main">
               <a:ext uri="{FF2B5EF4-FFF2-40B4-BE49-F238E27FC236}">
-                <a16:creationId xmlns:a16="http://schemas.microsoft.com/office/drawing/2014/main" id="{C21123FE-D042-4742-B650-C822D2860CFF}"/>
+                <a16:creationId xmlns:a16="http://schemas.microsoft.com/office/drawing/2014/main" id="{6962BE41-B482-44D4-A38E-2651B8BE0EA0}"/>
               </a:ext>
             </a:extLst>
           </p:cNvPr>
@@ -8007,7 +8007,7 @@
           <p:cNvPr id="6" name="">
             <a:extLst xmlns:a="http://schemas.openxmlformats.org/drawingml/2006/main">
               <a:ext uri="{FF2B5EF4-FFF2-40B4-BE49-F238E27FC236}">
-                <a16:creationId xmlns:a16="http://schemas.microsoft.com/office/drawing/2014/main" id="{0718ABAC-9638-4FF3-8EBB-8A755F14A891}"/>
+                <a16:creationId xmlns:a16="http://schemas.microsoft.com/office/drawing/2014/main" id="{7B1FE89C-9C86-4B5C-8108-8D3CAECB3ED4}"/>
               </a:ext>
             </a:extLst>
           </p:cNvPr>
@@ -8064,7 +8064,7 @@
           <p:cNvPr id="7" name="">
             <a:extLst xmlns:a="http://schemas.openxmlformats.org/drawingml/2006/main">
               <a:ext uri="{FF2B5EF4-FFF2-40B4-BE49-F238E27FC236}">
-                <a16:creationId xmlns:a16="http://schemas.microsoft.com/office/drawing/2014/main" id="{CFCC4CDB-1084-4AA9-BBFC-08DFC78630DE}"/>
+                <a16:creationId xmlns:a16="http://schemas.microsoft.com/office/drawing/2014/main" id="{A24B0D47-09FB-4E04-927B-B240CA1F55A2}"/>
               </a:ext>
             </a:extLst>
           </p:cNvPr>
@@ -8096,7 +8096,7 @@
           <p:cNvPr id="8" name="">
             <a:extLst xmlns:a="http://schemas.openxmlformats.org/drawingml/2006/main">
               <a:ext uri="{FF2B5EF4-FFF2-40B4-BE49-F238E27FC236}">
-                <a16:creationId xmlns:a16="http://schemas.microsoft.com/office/drawing/2014/main" id="{9B5B28DC-1937-4FF0-9858-9447873FE1B9}"/>
+                <a16:creationId xmlns:a16="http://schemas.microsoft.com/office/drawing/2014/main" id="{EB2C5F75-D754-4C80-BA42-52EDB0DAC73D}"/>
               </a:ext>
             </a:extLst>
           </p:cNvPr>
@@ -8153,7 +8153,7 @@
           <p:cNvPr id="9" name="">
             <a:extLst xmlns:a="http://schemas.openxmlformats.org/drawingml/2006/main">
               <a:ext uri="{FF2B5EF4-FFF2-40B4-BE49-F238E27FC236}">
-                <a16:creationId xmlns:a16="http://schemas.microsoft.com/office/drawing/2014/main" id="{D51D1748-CD2E-47E8-806E-D77C255DB0FD}"/>
+                <a16:creationId xmlns:a16="http://schemas.microsoft.com/office/drawing/2014/main" id="{A286D132-80C2-4DF6-9872-CF6CDCCD29A2}"/>
               </a:ext>
             </a:extLst>
           </p:cNvPr>
@@ -8210,19 +8210,19 @@
           <p:cNvPr id="10" name="">
             <a:extLst xmlns:a="http://schemas.openxmlformats.org/drawingml/2006/main">
               <a:ext uri="{FF2B5EF4-FFF2-40B4-BE49-F238E27FC236}">
-                <a16:creationId xmlns:a16="http://schemas.microsoft.com/office/drawing/2014/main" id="{B4982993-4F5D-4AFB-BE0E-AC7BC2020B54}"/>
-              </a:ext>
-            </a:extLst>
-          </p:cNvPr>
-          <p:cNvSpPr>
-            <a:spLocks xmlns:a="http://schemas.openxmlformats.org/drawingml/2006/main" noGrp="1"/>
-          </p:cNvSpPr>
-          <p:nvPr/>
-        </p:nvSpPr>
-        <p:spPr>
-          <a:xfrm xmlns:a="http://schemas.openxmlformats.org/drawingml/2006/main">
-            <a:off x="914400" y="1257300"/>
-            <a:ext cx="10363200" cy="781050"/>
+                <a16:creationId xmlns:a16="http://schemas.microsoft.com/office/drawing/2014/main" id="{B4C809F8-566E-4CBD-A77D-AE96A7272281}"/>
+              </a:ext>
+            </a:extLst>
+          </p:cNvPr>
+          <p:cNvSpPr>
+            <a:spLocks xmlns:a="http://schemas.openxmlformats.org/drawingml/2006/main" noGrp="1"/>
+          </p:cNvSpPr>
+          <p:nvPr/>
+        </p:nvSpPr>
+        <p:spPr>
+          <a:xfrm xmlns:a="http://schemas.openxmlformats.org/drawingml/2006/main">
+            <a:off x="857250" y="1219200"/>
+            <a:ext cx="10477500" cy="742950"/>
           </a:xfrm>
           <a:prstGeom xmlns:a="http://schemas.openxmlformats.org/drawingml/2006/main" prst="rect">
             <a:avLst/>
@@ -8239,7 +8239,7 @@
           <a:lstStyle xmlns:a="http://schemas.openxmlformats.org/drawingml/2006/main"/>
           <a:p xmlns:a="http://schemas.openxmlformats.org/drawingml/2006/main">
             <a:pPr algn="ctr">
-              <a:defRPr sz="2175" b="1">
+              <a:defRPr sz="2100" b="1">
                 <a:solidFill>
                   <a:srgbClr val="17253A"/>
                 </a:solidFill>
@@ -8249,7 +8249,7 @@
               </a:defRPr>
             </a:pPr>
             <a:r>
-              <a:rPr sz="2175" b="1">
+              <a:rPr sz="2100" b="1">
                 <a:solidFill>
                   <a:srgbClr val="17253A"/>
                 </a:solidFill>
@@ -8267,28 +8267,30 @@
           <p:cNvPr id="11" name="">
             <a:extLst xmlns:a="http://schemas.openxmlformats.org/drawingml/2006/main">
               <a:ext uri="{FF2B5EF4-FFF2-40B4-BE49-F238E27FC236}">
-                <a16:creationId xmlns:a16="http://schemas.microsoft.com/office/drawing/2014/main" id="{2F301975-C909-4CBC-8728-66E86F1E409C}"/>
-              </a:ext>
-            </a:extLst>
-          </p:cNvPr>
-          <p:cNvSpPr>
-            <a:spLocks xmlns:a="http://schemas.openxmlformats.org/drawingml/2006/main" noGrp="1"/>
-          </p:cNvSpPr>
-          <p:nvPr/>
-        </p:nvSpPr>
-        <p:spPr>
-          <a:xfrm xmlns:a="http://schemas.openxmlformats.org/drawingml/2006/main">
-            <a:off x="1000125" y="2247900"/>
-            <a:ext cx="476250" cy="476250"/>
-          </a:xfrm>
-          <a:prstGeom xmlns:a="http://schemas.openxmlformats.org/drawingml/2006/main" prst="ellipse">
+                <a16:creationId xmlns:a16="http://schemas.microsoft.com/office/drawing/2014/main" id="{73428254-5369-4011-AD4C-7C42F174C4A6}"/>
+              </a:ext>
+            </a:extLst>
+          </p:cNvPr>
+          <p:cNvSpPr>
+            <a:spLocks xmlns:a="http://schemas.openxmlformats.org/drawingml/2006/main" noGrp="1"/>
+          </p:cNvSpPr>
+          <p:nvPr/>
+        </p:nvSpPr>
+        <p:spPr>
+          <a:xfrm xmlns:a="http://schemas.openxmlformats.org/drawingml/2006/main">
+            <a:off x="971550" y="2124075"/>
+            <a:ext cx="38100" cy="3524250"/>
+          </a:xfrm>
+          <a:prstGeom xmlns:a="http://schemas.openxmlformats.org/drawingml/2006/main" prst="rect">
             <a:avLst/>
           </a:prstGeom>
           <a:solidFill xmlns:a="http://schemas.openxmlformats.org/drawingml/2006/main">
-            <a:srgbClr val="18324A"/>
+            <a:srgbClr val="2C6E73"/>
           </a:solidFill>
           <a:ln xmlns:a="http://schemas.openxmlformats.org/drawingml/2006/main" w="0">
-            <a:noFill/>
+            <a:solidFill>
+              <a:srgbClr val="2C6E73"/>
+            </a:solidFill>
           </a:ln>
         </p:spPr>
       </p:sp>
@@ -8297,19 +8299,19 @@
           <p:cNvPr id="12" name="">
             <a:extLst xmlns:a="http://schemas.openxmlformats.org/drawingml/2006/main">
               <a:ext uri="{FF2B5EF4-FFF2-40B4-BE49-F238E27FC236}">
-                <a16:creationId xmlns:a16="http://schemas.microsoft.com/office/drawing/2014/main" id="{758FDFBD-0204-40A2-BCC7-55AB3B4779A3}"/>
-              </a:ext>
-            </a:extLst>
-          </p:cNvPr>
-          <p:cNvSpPr>
-            <a:spLocks xmlns:a="http://schemas.openxmlformats.org/drawingml/2006/main" noGrp="1"/>
-          </p:cNvSpPr>
-          <p:nvPr/>
-        </p:nvSpPr>
-        <p:spPr>
-          <a:xfrm xmlns:a="http://schemas.openxmlformats.org/drawingml/2006/main">
-            <a:off x="1000125" y="2276475"/>
-            <a:ext cx="476250" cy="419100"/>
+                <a16:creationId xmlns:a16="http://schemas.microsoft.com/office/drawing/2014/main" id="{396E7118-32DE-442C-AFDC-AFD40FFDB05F}"/>
+              </a:ext>
+            </a:extLst>
+          </p:cNvPr>
+          <p:cNvSpPr>
+            <a:spLocks xmlns:a="http://schemas.openxmlformats.org/drawingml/2006/main" noGrp="1"/>
+          </p:cNvSpPr>
+          <p:nvPr/>
+        </p:nvSpPr>
+        <p:spPr>
+          <a:xfrm xmlns:a="http://schemas.openxmlformats.org/drawingml/2006/main">
+            <a:off x="1162050" y="2200275"/>
+            <a:ext cx="400050" cy="400050"/>
           </a:xfrm>
           <a:prstGeom xmlns:a="http://schemas.openxmlformats.org/drawingml/2006/main" prst="rect">
             <a:avLst/>
@@ -8326,9 +8328,9 @@
           <a:lstStyle xmlns:a="http://schemas.openxmlformats.org/drawingml/2006/main"/>
           <a:p xmlns:a="http://schemas.openxmlformats.org/drawingml/2006/main">
             <a:pPr algn="ctr">
-              <a:defRPr sz="1350" b="1">
-                <a:solidFill>
-                  <a:srgbClr val="FFFFFF"/>
+              <a:defRPr sz="1125" b="1">
+                <a:solidFill>
+                  <a:srgbClr val="2C6E73"/>
                 </a:solidFill>
                 <a:latin typeface="Arial"/>
                 <a:ea typeface="Arial"/>
@@ -8336,9 +8338,9 @@
               </a:defRPr>
             </a:pPr>
             <a:r>
-              <a:rPr sz="1350" b="1">
-                <a:solidFill>
-                  <a:srgbClr val="FFFFFF"/>
+              <a:rPr sz="1125" b="1">
+                <a:solidFill>
+                  <a:srgbClr val="2C6E73"/>
                 </a:solidFill>
                 <a:latin typeface="Arial"/>
                 <a:ea typeface="Arial"/>
@@ -8354,19 +8356,19 @@
           <p:cNvPr id="13" name="">
             <a:extLst xmlns:a="http://schemas.openxmlformats.org/drawingml/2006/main">
               <a:ext uri="{FF2B5EF4-FFF2-40B4-BE49-F238E27FC236}">
-                <a16:creationId xmlns:a16="http://schemas.microsoft.com/office/drawing/2014/main" id="{726140D7-3FF1-4486-8B94-2813B3E4CA82}"/>
-              </a:ext>
-            </a:extLst>
-          </p:cNvPr>
-          <p:cNvSpPr>
-            <a:spLocks xmlns:a="http://schemas.openxmlformats.org/drawingml/2006/main" noGrp="1"/>
-          </p:cNvSpPr>
-          <p:nvPr/>
-        </p:nvSpPr>
-        <p:spPr>
-          <a:xfrm xmlns:a="http://schemas.openxmlformats.org/drawingml/2006/main">
-            <a:off x="1714500" y="2181225"/>
-            <a:ext cx="9429750" cy="609600"/>
+                <a16:creationId xmlns:a16="http://schemas.microsoft.com/office/drawing/2014/main" id="{FEDE8F37-CE6B-4904-9CC5-1C1B07F73A19}"/>
+              </a:ext>
+            </a:extLst>
+          </p:cNvPr>
+          <p:cNvSpPr>
+            <a:spLocks xmlns:a="http://schemas.openxmlformats.org/drawingml/2006/main" noGrp="1"/>
+          </p:cNvSpPr>
+          <p:nvPr/>
+        </p:nvSpPr>
+        <p:spPr>
+          <a:xfrm xmlns:a="http://schemas.openxmlformats.org/drawingml/2006/main">
+            <a:off x="1714500" y="2114550"/>
+            <a:ext cx="9525000" cy="809625"/>
           </a:xfrm>
           <a:prstGeom xmlns:a="http://schemas.openxmlformats.org/drawingml/2006/main" prst="rect">
             <a:avLst/>
@@ -8383,7 +8385,7 @@
           <a:lstStyle xmlns:a="http://schemas.openxmlformats.org/drawingml/2006/main"/>
           <a:p xmlns:a="http://schemas.openxmlformats.org/drawingml/2006/main">
             <a:pPr algn="l">
-              <a:defRPr sz="1500" b="0">
+              <a:defRPr sz="1725" b="0">
                 <a:solidFill>
                   <a:srgbClr val="17253A"/>
                 </a:solidFill>
@@ -8393,7 +8395,7 @@
               </a:defRPr>
             </a:pPr>
             <a:r>
-              <a:rPr sz="1500" b="0">
+              <a:rPr sz="1725" b="0">
                 <a:solidFill>
                   <a:srgbClr val="17253A"/>
                 </a:solidFill>
@@ -8401,7 +8403,7 @@
                 <a:ea typeface="Arial"/>
                 <a:cs typeface="Arial"/>
               </a:rPr>
-              <a:t>Identify the structure: Convert mixed numbers to improper fractions when needed.</a:t>
+              <a:t>4/7 of 21</a:t>
             </a:r>
           </a:p>
         </p:txBody>
@@ -8411,28 +8413,30 @@
           <p:cNvPr id="14" name="">
             <a:extLst xmlns:a="http://schemas.openxmlformats.org/drawingml/2006/main">
               <a:ext uri="{FF2B5EF4-FFF2-40B4-BE49-F238E27FC236}">
-                <a16:creationId xmlns:a16="http://schemas.microsoft.com/office/drawing/2014/main" id="{2027AE64-DE19-47AA-9CE5-A7B12E9E7801}"/>
-              </a:ext>
-            </a:extLst>
-          </p:cNvPr>
-          <p:cNvSpPr>
-            <a:spLocks xmlns:a="http://schemas.openxmlformats.org/drawingml/2006/main" noGrp="1"/>
-          </p:cNvSpPr>
-          <p:nvPr/>
-        </p:nvSpPr>
-        <p:spPr>
-          <a:xfrm xmlns:a="http://schemas.openxmlformats.org/drawingml/2006/main">
-            <a:off x="1000125" y="2990850"/>
-            <a:ext cx="476250" cy="476250"/>
-          </a:xfrm>
-          <a:prstGeom xmlns:a="http://schemas.openxmlformats.org/drawingml/2006/main" prst="ellipse">
+                <a16:creationId xmlns:a16="http://schemas.microsoft.com/office/drawing/2014/main" id="{88D7741B-A174-468B-A70F-74DBEEF3AA0B}"/>
+              </a:ext>
+            </a:extLst>
+          </p:cNvPr>
+          <p:cNvSpPr>
+            <a:spLocks xmlns:a="http://schemas.openxmlformats.org/drawingml/2006/main" noGrp="1"/>
+          </p:cNvSpPr>
+          <p:nvPr/>
+        </p:nvSpPr>
+        <p:spPr>
+          <a:xfrm xmlns:a="http://schemas.openxmlformats.org/drawingml/2006/main">
+            <a:off x="1714500" y="2943225"/>
+            <a:ext cx="9334500" cy="9525"/>
+          </a:xfrm>
+          <a:prstGeom xmlns:a="http://schemas.openxmlformats.org/drawingml/2006/main" prst="rect">
             <a:avLst/>
           </a:prstGeom>
           <a:solidFill xmlns:a="http://schemas.openxmlformats.org/drawingml/2006/main">
-            <a:srgbClr val="2C6E73"/>
+            <a:srgbClr val="D9E0E6"/>
           </a:solidFill>
           <a:ln xmlns:a="http://schemas.openxmlformats.org/drawingml/2006/main" w="0">
-            <a:noFill/>
+            <a:solidFill>
+              <a:srgbClr val="D9E0E6"/>
+            </a:solidFill>
           </a:ln>
         </p:spPr>
       </p:sp>
@@ -8441,19 +8445,19 @@
           <p:cNvPr id="15" name="">
             <a:extLst xmlns:a="http://schemas.openxmlformats.org/drawingml/2006/main">
               <a:ext uri="{FF2B5EF4-FFF2-40B4-BE49-F238E27FC236}">
-                <a16:creationId xmlns:a16="http://schemas.microsoft.com/office/drawing/2014/main" id="{DFA2F9B1-BC60-4C13-B6B5-12404E2D2E2A}"/>
-              </a:ext>
-            </a:extLst>
-          </p:cNvPr>
-          <p:cNvSpPr>
-            <a:spLocks xmlns:a="http://schemas.openxmlformats.org/drawingml/2006/main" noGrp="1"/>
-          </p:cNvSpPr>
-          <p:nvPr/>
-        </p:nvSpPr>
-        <p:spPr>
-          <a:xfrm xmlns:a="http://schemas.openxmlformats.org/drawingml/2006/main">
-            <a:off x="1000125" y="3019425"/>
-            <a:ext cx="476250" cy="419100"/>
+                <a16:creationId xmlns:a16="http://schemas.microsoft.com/office/drawing/2014/main" id="{BAE2ECD1-A0F0-4729-BD7D-3F069971E8E2}"/>
+              </a:ext>
+            </a:extLst>
+          </p:cNvPr>
+          <p:cNvSpPr>
+            <a:spLocks xmlns:a="http://schemas.openxmlformats.org/drawingml/2006/main" noGrp="1"/>
+          </p:cNvSpPr>
+          <p:nvPr/>
+        </p:nvSpPr>
+        <p:spPr>
+          <a:xfrm xmlns:a="http://schemas.openxmlformats.org/drawingml/2006/main">
+            <a:off x="1162050" y="3076575"/>
+            <a:ext cx="400050" cy="400050"/>
           </a:xfrm>
           <a:prstGeom xmlns:a="http://schemas.openxmlformats.org/drawingml/2006/main" prst="rect">
             <a:avLst/>
@@ -8470,9 +8474,9 @@
           <a:lstStyle xmlns:a="http://schemas.openxmlformats.org/drawingml/2006/main"/>
           <a:p xmlns:a="http://schemas.openxmlformats.org/drawingml/2006/main">
             <a:pPr algn="ctr">
-              <a:defRPr sz="1350" b="1">
-                <a:solidFill>
-                  <a:srgbClr val="FFFFFF"/>
+              <a:defRPr sz="1125" b="1">
+                <a:solidFill>
+                  <a:srgbClr val="2C6E73"/>
                 </a:solidFill>
                 <a:latin typeface="Arial"/>
                 <a:ea typeface="Arial"/>
@@ -8480,9 +8484,9 @@
               </a:defRPr>
             </a:pPr>
             <a:r>
-              <a:rPr sz="1350" b="1">
-                <a:solidFill>
-                  <a:srgbClr val="FFFFFF"/>
+              <a:rPr sz="1125" b="1">
+                <a:solidFill>
+                  <a:srgbClr val="2C6E73"/>
                 </a:solidFill>
                 <a:latin typeface="Arial"/>
                 <a:ea typeface="Arial"/>
@@ -8498,19 +8502,19 @@
           <p:cNvPr id="16" name="">
             <a:extLst xmlns:a="http://schemas.openxmlformats.org/drawingml/2006/main">
               <a:ext uri="{FF2B5EF4-FFF2-40B4-BE49-F238E27FC236}">
-                <a16:creationId xmlns:a16="http://schemas.microsoft.com/office/drawing/2014/main" id="{6E8EB812-2C2A-4C61-B2BB-BC525EF0B91E}"/>
-              </a:ext>
-            </a:extLst>
-          </p:cNvPr>
-          <p:cNvSpPr>
-            <a:spLocks xmlns:a="http://schemas.openxmlformats.org/drawingml/2006/main" noGrp="1"/>
-          </p:cNvSpPr>
-          <p:nvPr/>
-        </p:nvSpPr>
-        <p:spPr>
-          <a:xfrm xmlns:a="http://schemas.openxmlformats.org/drawingml/2006/main">
-            <a:off x="1714500" y="2924175"/>
-            <a:ext cx="9429750" cy="609600"/>
+                <a16:creationId xmlns:a16="http://schemas.microsoft.com/office/drawing/2014/main" id="{E4982080-EC98-497B-A360-9C3EFB6240A6}"/>
+              </a:ext>
+            </a:extLst>
+          </p:cNvPr>
+          <p:cNvSpPr>
+            <a:spLocks xmlns:a="http://schemas.openxmlformats.org/drawingml/2006/main" noGrp="1"/>
+          </p:cNvSpPr>
+          <p:nvPr/>
+        </p:nvSpPr>
+        <p:spPr>
+          <a:xfrm xmlns:a="http://schemas.openxmlformats.org/drawingml/2006/main">
+            <a:off x="1714500" y="2990850"/>
+            <a:ext cx="9525000" cy="809625"/>
           </a:xfrm>
           <a:prstGeom xmlns:a="http://schemas.openxmlformats.org/drawingml/2006/main" prst="rect">
             <a:avLst/>
@@ -8527,7 +8531,7 @@
           <a:lstStyle xmlns:a="http://schemas.openxmlformats.org/drawingml/2006/main"/>
           <a:p xmlns:a="http://schemas.openxmlformats.org/drawingml/2006/main">
             <a:pPr algn="l">
-              <a:defRPr sz="1500" b="0">
+              <a:defRPr sz="1725" b="0">
                 <a:solidFill>
                   <a:srgbClr val="17253A"/>
                 </a:solidFill>
@@ -8537,7 +8541,7 @@
               </a:defRPr>
             </a:pPr>
             <a:r>
-              <a:rPr sz="1500" b="0">
+              <a:rPr sz="1725" b="0">
                 <a:solidFill>
                   <a:srgbClr val="17253A"/>
                 </a:solidFill>
@@ -8545,7 +8549,7 @@
                 <a:ea typeface="Arial"/>
                 <a:cs typeface="Arial"/>
               </a:rPr>
-              <a:t>Set up the method: Multiply numerators and denominators, cancelling common factors efficiently.</a:t>
+              <a:t>21 ÷ 7 = 3</a:t>
             </a:r>
           </a:p>
         </p:txBody>
@@ -8555,28 +8559,30 @@
           <p:cNvPr id="17" name="">
             <a:extLst xmlns:a="http://schemas.openxmlformats.org/drawingml/2006/main">
               <a:ext uri="{FF2B5EF4-FFF2-40B4-BE49-F238E27FC236}">
-                <a16:creationId xmlns:a16="http://schemas.microsoft.com/office/drawing/2014/main" id="{948B9820-E71F-4AD9-BB8A-5565EDA63354}"/>
-              </a:ext>
-            </a:extLst>
-          </p:cNvPr>
-          <p:cNvSpPr>
-            <a:spLocks xmlns:a="http://schemas.openxmlformats.org/drawingml/2006/main" noGrp="1"/>
-          </p:cNvSpPr>
-          <p:nvPr/>
-        </p:nvSpPr>
-        <p:spPr>
-          <a:xfrm xmlns:a="http://schemas.openxmlformats.org/drawingml/2006/main">
-            <a:off x="1000125" y="3733800"/>
-            <a:ext cx="476250" cy="476250"/>
-          </a:xfrm>
-          <a:prstGeom xmlns:a="http://schemas.openxmlformats.org/drawingml/2006/main" prst="ellipse">
+                <a16:creationId xmlns:a16="http://schemas.microsoft.com/office/drawing/2014/main" id="{77212146-773F-4084-A5EA-D54E70ED741A}"/>
+              </a:ext>
+            </a:extLst>
+          </p:cNvPr>
+          <p:cNvSpPr>
+            <a:spLocks xmlns:a="http://schemas.openxmlformats.org/drawingml/2006/main" noGrp="1"/>
+          </p:cNvSpPr>
+          <p:nvPr/>
+        </p:nvSpPr>
+        <p:spPr>
+          <a:xfrm xmlns:a="http://schemas.openxmlformats.org/drawingml/2006/main">
+            <a:off x="1714500" y="3819525"/>
+            <a:ext cx="9334500" cy="9525"/>
+          </a:xfrm>
+          <a:prstGeom xmlns:a="http://schemas.openxmlformats.org/drawingml/2006/main" prst="rect">
             <a:avLst/>
           </a:prstGeom>
           <a:solidFill xmlns:a="http://schemas.openxmlformats.org/drawingml/2006/main">
-            <a:srgbClr val="2C6E73"/>
+            <a:srgbClr val="D9E0E6"/>
           </a:solidFill>
           <a:ln xmlns:a="http://schemas.openxmlformats.org/drawingml/2006/main" w="0">
-            <a:noFill/>
+            <a:solidFill>
+              <a:srgbClr val="D9E0E6"/>
+            </a:solidFill>
           </a:ln>
         </p:spPr>
       </p:sp>
@@ -8585,19 +8591,19 @@
           <p:cNvPr id="18" name="">
             <a:extLst xmlns:a="http://schemas.openxmlformats.org/drawingml/2006/main">
               <a:ext uri="{FF2B5EF4-FFF2-40B4-BE49-F238E27FC236}">
-                <a16:creationId xmlns:a16="http://schemas.microsoft.com/office/drawing/2014/main" id="{793F464F-5529-48DB-B84E-453E89116FBE}"/>
-              </a:ext>
-            </a:extLst>
-          </p:cNvPr>
-          <p:cNvSpPr>
-            <a:spLocks xmlns:a="http://schemas.openxmlformats.org/drawingml/2006/main" noGrp="1"/>
-          </p:cNvSpPr>
-          <p:nvPr/>
-        </p:nvSpPr>
-        <p:spPr>
-          <a:xfrm xmlns:a="http://schemas.openxmlformats.org/drawingml/2006/main">
-            <a:off x="1000125" y="3762375"/>
-            <a:ext cx="476250" cy="419100"/>
+                <a16:creationId xmlns:a16="http://schemas.microsoft.com/office/drawing/2014/main" id="{7ED68CBC-CE1B-4740-ABFE-BE624630580A}"/>
+              </a:ext>
+            </a:extLst>
+          </p:cNvPr>
+          <p:cNvSpPr>
+            <a:spLocks xmlns:a="http://schemas.openxmlformats.org/drawingml/2006/main" noGrp="1"/>
+          </p:cNvSpPr>
+          <p:nvPr/>
+        </p:nvSpPr>
+        <p:spPr>
+          <a:xfrm xmlns:a="http://schemas.openxmlformats.org/drawingml/2006/main">
+            <a:off x="1162050" y="3952875"/>
+            <a:ext cx="400050" cy="400050"/>
           </a:xfrm>
           <a:prstGeom xmlns:a="http://schemas.openxmlformats.org/drawingml/2006/main" prst="rect">
             <a:avLst/>
@@ -8614,9 +8620,9 @@
           <a:lstStyle xmlns:a="http://schemas.openxmlformats.org/drawingml/2006/main"/>
           <a:p xmlns:a="http://schemas.openxmlformats.org/drawingml/2006/main">
             <a:pPr algn="ctr">
-              <a:defRPr sz="1350" b="1">
-                <a:solidFill>
-                  <a:srgbClr val="FFFFFF"/>
+              <a:defRPr sz="1125" b="1">
+                <a:solidFill>
+                  <a:srgbClr val="2C6E73"/>
                 </a:solidFill>
                 <a:latin typeface="Arial"/>
                 <a:ea typeface="Arial"/>
@@ -8624,9 +8630,9 @@
               </a:defRPr>
             </a:pPr>
             <a:r>
-              <a:rPr sz="1350" b="1">
-                <a:solidFill>
-                  <a:srgbClr val="FFFFFF"/>
+              <a:rPr sz="1125" b="1">
+                <a:solidFill>
+                  <a:srgbClr val="2C6E73"/>
                 </a:solidFill>
                 <a:latin typeface="Arial"/>
                 <a:ea typeface="Arial"/>
@@ -8642,19 +8648,19 @@
           <p:cNvPr id="19" name="">
             <a:extLst xmlns:a="http://schemas.openxmlformats.org/drawingml/2006/main">
               <a:ext uri="{FF2B5EF4-FFF2-40B4-BE49-F238E27FC236}">
-                <a16:creationId xmlns:a16="http://schemas.microsoft.com/office/drawing/2014/main" id="{BC9D0355-B927-4D88-B108-1C740EAA9CCB}"/>
-              </a:ext>
-            </a:extLst>
-          </p:cNvPr>
-          <p:cNvSpPr>
-            <a:spLocks xmlns:a="http://schemas.openxmlformats.org/drawingml/2006/main" noGrp="1"/>
-          </p:cNvSpPr>
-          <p:nvPr/>
-        </p:nvSpPr>
-        <p:spPr>
-          <a:xfrm xmlns:a="http://schemas.openxmlformats.org/drawingml/2006/main">
-            <a:off x="1714500" y="3667125"/>
-            <a:ext cx="9429750" cy="609600"/>
+                <a16:creationId xmlns:a16="http://schemas.microsoft.com/office/drawing/2014/main" id="{B45BF1C7-A626-4C55-A074-FEE7E1E2FA04}"/>
+              </a:ext>
+            </a:extLst>
+          </p:cNvPr>
+          <p:cNvSpPr>
+            <a:spLocks xmlns:a="http://schemas.openxmlformats.org/drawingml/2006/main" noGrp="1"/>
+          </p:cNvSpPr>
+          <p:nvPr/>
+        </p:nvSpPr>
+        <p:spPr>
+          <a:xfrm xmlns:a="http://schemas.openxmlformats.org/drawingml/2006/main">
+            <a:off x="1714500" y="3867150"/>
+            <a:ext cx="9525000" cy="809625"/>
           </a:xfrm>
           <a:prstGeom xmlns:a="http://schemas.openxmlformats.org/drawingml/2006/main" prst="rect">
             <a:avLst/>
@@ -8671,7 +8677,7 @@
           <a:lstStyle xmlns:a="http://schemas.openxmlformats.org/drawingml/2006/main"/>
           <a:p xmlns:a="http://schemas.openxmlformats.org/drawingml/2006/main">
             <a:pPr algn="l">
-              <a:defRPr sz="1500" b="0">
+              <a:defRPr sz="1725" b="0">
                 <a:solidFill>
                   <a:srgbClr val="17253A"/>
                 </a:solidFill>
@@ -8681,7 +8687,7 @@
               </a:defRPr>
             </a:pPr>
             <a:r>
-              <a:rPr sz="1500" b="0">
+              <a:rPr sz="1725" b="0">
                 <a:solidFill>
                   <a:srgbClr val="17253A"/>
                 </a:solidFill>
@@ -8689,7 +8695,7 @@
                 <a:ea typeface="Arial"/>
                 <a:cs typeface="Arial"/>
               </a:rPr>
-              <a:t>Complete the calculation: 12.</a:t>
+              <a:t>3 × 4</a:t>
             </a:r>
           </a:p>
         </p:txBody>
@@ -8699,28 +8705,30 @@
           <p:cNvPr id="20" name="">
             <a:extLst xmlns:a="http://schemas.openxmlformats.org/drawingml/2006/main">
               <a:ext uri="{FF2B5EF4-FFF2-40B4-BE49-F238E27FC236}">
-                <a16:creationId xmlns:a16="http://schemas.microsoft.com/office/drawing/2014/main" id="{C7ABA659-7C12-4FEA-8F01-27723361D51E}"/>
-              </a:ext>
-            </a:extLst>
-          </p:cNvPr>
-          <p:cNvSpPr>
-            <a:spLocks xmlns:a="http://schemas.openxmlformats.org/drawingml/2006/main" noGrp="1"/>
-          </p:cNvSpPr>
-          <p:nvPr/>
-        </p:nvSpPr>
-        <p:spPr>
-          <a:xfrm xmlns:a="http://schemas.openxmlformats.org/drawingml/2006/main">
-            <a:off x="1000125" y="4476750"/>
-            <a:ext cx="476250" cy="476250"/>
-          </a:xfrm>
-          <a:prstGeom xmlns:a="http://schemas.openxmlformats.org/drawingml/2006/main" prst="ellipse">
+                <a16:creationId xmlns:a16="http://schemas.microsoft.com/office/drawing/2014/main" id="{410C15C0-9A71-4492-8F6D-7233BA75E14A}"/>
+              </a:ext>
+            </a:extLst>
+          </p:cNvPr>
+          <p:cNvSpPr>
+            <a:spLocks xmlns:a="http://schemas.openxmlformats.org/drawingml/2006/main" noGrp="1"/>
+          </p:cNvSpPr>
+          <p:nvPr/>
+        </p:nvSpPr>
+        <p:spPr>
+          <a:xfrm xmlns:a="http://schemas.openxmlformats.org/drawingml/2006/main">
+            <a:off x="1714500" y="4695825"/>
+            <a:ext cx="9334500" cy="9525"/>
+          </a:xfrm>
+          <a:prstGeom xmlns:a="http://schemas.openxmlformats.org/drawingml/2006/main" prst="rect">
             <a:avLst/>
           </a:prstGeom>
           <a:solidFill xmlns:a="http://schemas.openxmlformats.org/drawingml/2006/main">
-            <a:srgbClr val="2C6E73"/>
+            <a:srgbClr val="D9E0E6"/>
           </a:solidFill>
           <a:ln xmlns:a="http://schemas.openxmlformats.org/drawingml/2006/main" w="0">
-            <a:noFill/>
+            <a:solidFill>
+              <a:srgbClr val="D9E0E6"/>
+            </a:solidFill>
           </a:ln>
         </p:spPr>
       </p:sp>
@@ -8729,19 +8737,19 @@
           <p:cNvPr id="21" name="">
             <a:extLst xmlns:a="http://schemas.openxmlformats.org/drawingml/2006/main">
               <a:ext uri="{FF2B5EF4-FFF2-40B4-BE49-F238E27FC236}">
-                <a16:creationId xmlns:a16="http://schemas.microsoft.com/office/drawing/2014/main" id="{F9794C36-6A90-48F8-84A4-0E5F3D7B349F}"/>
-              </a:ext>
-            </a:extLst>
-          </p:cNvPr>
-          <p:cNvSpPr>
-            <a:spLocks xmlns:a="http://schemas.openxmlformats.org/drawingml/2006/main" noGrp="1"/>
-          </p:cNvSpPr>
-          <p:nvPr/>
-        </p:nvSpPr>
-        <p:spPr>
-          <a:xfrm xmlns:a="http://schemas.openxmlformats.org/drawingml/2006/main">
-            <a:off x="1000125" y="4505325"/>
-            <a:ext cx="476250" cy="419100"/>
+                <a16:creationId xmlns:a16="http://schemas.microsoft.com/office/drawing/2014/main" id="{DE31AADA-93F6-4AD5-A9BC-372FDC16D5EA}"/>
+              </a:ext>
+            </a:extLst>
+          </p:cNvPr>
+          <p:cNvSpPr>
+            <a:spLocks xmlns:a="http://schemas.openxmlformats.org/drawingml/2006/main" noGrp="1"/>
+          </p:cNvSpPr>
+          <p:nvPr/>
+        </p:nvSpPr>
+        <p:spPr>
+          <a:xfrm xmlns:a="http://schemas.openxmlformats.org/drawingml/2006/main">
+            <a:off x="1162050" y="4829175"/>
+            <a:ext cx="400050" cy="400050"/>
           </a:xfrm>
           <a:prstGeom xmlns:a="http://schemas.openxmlformats.org/drawingml/2006/main" prst="rect">
             <a:avLst/>
@@ -8758,9 +8766,9 @@
           <a:lstStyle xmlns:a="http://schemas.openxmlformats.org/drawingml/2006/main"/>
           <a:p xmlns:a="http://schemas.openxmlformats.org/drawingml/2006/main">
             <a:pPr algn="ctr">
-              <a:defRPr sz="1350" b="1">
-                <a:solidFill>
-                  <a:srgbClr val="FFFFFF"/>
+              <a:defRPr sz="1125" b="1">
+                <a:solidFill>
+                  <a:srgbClr val="2F785D"/>
                 </a:solidFill>
                 <a:latin typeface="Arial"/>
                 <a:ea typeface="Arial"/>
@@ -8768,9 +8776,9 @@
               </a:defRPr>
             </a:pPr>
             <a:r>
-              <a:rPr sz="1350" b="1">
-                <a:solidFill>
-                  <a:srgbClr val="FFFFFF"/>
+              <a:rPr sz="1125" b="1">
+                <a:solidFill>
+                  <a:srgbClr val="2F785D"/>
                 </a:solidFill>
                 <a:latin typeface="Arial"/>
                 <a:ea typeface="Arial"/>
@@ -8786,19 +8794,19 @@
           <p:cNvPr id="22" name="">
             <a:extLst xmlns:a="http://schemas.openxmlformats.org/drawingml/2006/main">
               <a:ext uri="{FF2B5EF4-FFF2-40B4-BE49-F238E27FC236}">
-                <a16:creationId xmlns:a16="http://schemas.microsoft.com/office/drawing/2014/main" id="{B895D6A9-775F-42D3-A016-2B034AA6E6DA}"/>
-              </a:ext>
-            </a:extLst>
-          </p:cNvPr>
-          <p:cNvSpPr>
-            <a:spLocks xmlns:a="http://schemas.openxmlformats.org/drawingml/2006/main" noGrp="1"/>
-          </p:cNvSpPr>
-          <p:nvPr/>
-        </p:nvSpPr>
-        <p:spPr>
-          <a:xfrm xmlns:a="http://schemas.openxmlformats.org/drawingml/2006/main">
-            <a:off x="1714500" y="4410075"/>
-            <a:ext cx="9429750" cy="609600"/>
+                <a16:creationId xmlns:a16="http://schemas.microsoft.com/office/drawing/2014/main" id="{5B195C4C-CADD-4A51-B09E-7BB5E3D03188}"/>
+              </a:ext>
+            </a:extLst>
+          </p:cNvPr>
+          <p:cNvSpPr>
+            <a:spLocks xmlns:a="http://schemas.openxmlformats.org/drawingml/2006/main" noGrp="1"/>
+          </p:cNvSpPr>
+          <p:nvPr/>
+        </p:nvSpPr>
+        <p:spPr>
+          <a:xfrm xmlns:a="http://schemas.openxmlformats.org/drawingml/2006/main">
+            <a:off x="1714500" y="4743450"/>
+            <a:ext cx="9525000" cy="809625"/>
           </a:xfrm>
           <a:prstGeom xmlns:a="http://schemas.openxmlformats.org/drawingml/2006/main" prst="rect">
             <a:avLst/>
@@ -8815,7 +8823,7 @@
           <a:lstStyle xmlns:a="http://schemas.openxmlformats.org/drawingml/2006/main"/>
           <a:p xmlns:a="http://schemas.openxmlformats.org/drawingml/2006/main">
             <a:pPr algn="l">
-              <a:defRPr sz="1500" b="1">
+              <a:defRPr sz="1725" b="1">
                 <a:solidFill>
                   <a:srgbClr val="2F785D"/>
                 </a:solidFill>
@@ -8825,7 +8833,7 @@
               </a:defRPr>
             </a:pPr>
             <a:r>
-              <a:rPr sz="1500" b="1">
+              <a:rPr sz="1725" b="1">
                 <a:solidFill>
                   <a:srgbClr val="2F785D"/>
                 </a:solidFill>
@@ -8833,7 +8841,7 @@
                 <a:ea typeface="Arial"/>
                 <a:cs typeface="Arial"/>
               </a:rPr>
-              <a:t>Check the result: Simplify the product and check its size.</a:t>
+              <a:t>12</a:t>
             </a:r>
           </a:p>
         </p:txBody>
@@ -8841,7 +8849,7 @@
     </p:spTree>
     <p:extLst>
       <p:ext uri="{BB962C8B-B14F-4D97-AF65-F5344CB8AC3E}">
-        <p14:creationId xmlns:p14="http://schemas.microsoft.com/office/powerpoint/2010/main" val="2083269494"/>
+        <p14:creationId xmlns:p14="http://schemas.microsoft.com/office/powerpoint/2010/main" val="1535267417"/>
       </p:ext>
     </p:extLst>
   </p:cSld>
@@ -9134,7 +9142,7 @@
           <p:cNvPr id="15" name="">
             <a:extLst xmlns:a="http://schemas.openxmlformats.org/drawingml/2006/main">
               <a:ext uri="{FF2B5EF4-FFF2-40B4-BE49-F238E27FC236}">
-                <a16:creationId xmlns:a16="http://schemas.microsoft.com/office/drawing/2014/main" id="{5DE2D3B9-2B37-48B0-B1B5-D83123495C79}"/>
+                <a16:creationId xmlns:a16="http://schemas.microsoft.com/office/drawing/2014/main" id="{15CF4640-E74C-4807-9FA7-E86D2BA69047}"/>
               </a:ext>
             </a:extLst>
           </p:cNvPr>
@@ -9166,7 +9174,7 @@
           <p:cNvPr id="2" name="">
             <a:extLst xmlns:a="http://schemas.openxmlformats.org/drawingml/2006/main">
               <a:ext uri="{FF2B5EF4-FFF2-40B4-BE49-F238E27FC236}">
-                <a16:creationId xmlns:a16="http://schemas.microsoft.com/office/drawing/2014/main" id="{7AF58F16-41C7-4162-8DC3-754ACEE9AA24}"/>
+                <a16:creationId xmlns:a16="http://schemas.microsoft.com/office/drawing/2014/main" id="{2778FCB7-F0C7-4B25-9645-9CB9F1F34194}"/>
               </a:ext>
             </a:extLst>
           </p:cNvPr>
@@ -9223,7 +9231,7 @@
           <p:cNvPr id="3" name="">
             <a:extLst xmlns:a="http://schemas.openxmlformats.org/drawingml/2006/main">
               <a:ext uri="{FF2B5EF4-FFF2-40B4-BE49-F238E27FC236}">
-                <a16:creationId xmlns:a16="http://schemas.microsoft.com/office/drawing/2014/main" id="{2F513005-8C7F-4440-9B0A-8E8742344657}"/>
+                <a16:creationId xmlns:a16="http://schemas.microsoft.com/office/drawing/2014/main" id="{84496317-363E-4416-8837-AD56938EFE40}"/>
               </a:ext>
             </a:extLst>
           </p:cNvPr>
@@ -9255,7 +9263,7 @@
           <p:cNvPr id="4" name="">
             <a:extLst xmlns:a="http://schemas.openxmlformats.org/drawingml/2006/main">
               <a:ext uri="{FF2B5EF4-FFF2-40B4-BE49-F238E27FC236}">
-                <a16:creationId xmlns:a16="http://schemas.microsoft.com/office/drawing/2014/main" id="{D99B1CA2-A570-46E4-AF98-01F3BFE1378B}"/>
+                <a16:creationId xmlns:a16="http://schemas.microsoft.com/office/drawing/2014/main" id="{FBB8DC8F-6117-4645-A4A8-B60BD432353A}"/>
               </a:ext>
             </a:extLst>
           </p:cNvPr>
@@ -9312,7 +9320,7 @@
           <p:cNvPr id="5" name="">
             <a:extLst xmlns:a="http://schemas.openxmlformats.org/drawingml/2006/main">
               <a:ext uri="{FF2B5EF4-FFF2-40B4-BE49-F238E27FC236}">
-                <a16:creationId xmlns:a16="http://schemas.microsoft.com/office/drawing/2014/main" id="{2BEAE3EF-6338-4269-A9ED-8A005ECB602A}"/>
+                <a16:creationId xmlns:a16="http://schemas.microsoft.com/office/drawing/2014/main" id="{41813E0B-5A78-4223-9216-4A63E1BDD4AC}"/>
               </a:ext>
             </a:extLst>
           </p:cNvPr>
@@ -9369,7 +9377,7 @@
           <p:cNvPr id="6" name="">
             <a:extLst xmlns:a="http://schemas.openxmlformats.org/drawingml/2006/main">
               <a:ext uri="{FF2B5EF4-FFF2-40B4-BE49-F238E27FC236}">
-                <a16:creationId xmlns:a16="http://schemas.microsoft.com/office/drawing/2014/main" id="{875B93D2-0007-4173-BB5A-2A965080B2C0}"/>
+                <a16:creationId xmlns:a16="http://schemas.microsoft.com/office/drawing/2014/main" id="{68AF2359-F6A3-4F08-833A-B64BE1BB24DB}"/>
               </a:ext>
             </a:extLst>
           </p:cNvPr>
@@ -9426,7 +9434,7 @@
           <p:cNvPr id="7" name="">
             <a:extLst xmlns:a="http://schemas.openxmlformats.org/drawingml/2006/main">
               <a:ext uri="{FF2B5EF4-FFF2-40B4-BE49-F238E27FC236}">
-                <a16:creationId xmlns:a16="http://schemas.microsoft.com/office/drawing/2014/main" id="{31399231-2178-4B8C-BED5-E39A1FAB7EC8}"/>
+                <a16:creationId xmlns:a16="http://schemas.microsoft.com/office/drawing/2014/main" id="{6900687A-C438-4A42-A70C-DDB45B613C06}"/>
               </a:ext>
             </a:extLst>
           </p:cNvPr>
@@ -9458,7 +9466,7 @@
           <p:cNvPr id="8" name="">
             <a:extLst xmlns:a="http://schemas.openxmlformats.org/drawingml/2006/main">
               <a:ext uri="{FF2B5EF4-FFF2-40B4-BE49-F238E27FC236}">
-                <a16:creationId xmlns:a16="http://schemas.microsoft.com/office/drawing/2014/main" id="{9A7B8183-E16B-4C1D-A3B3-73A69D044F2B}"/>
+                <a16:creationId xmlns:a16="http://schemas.microsoft.com/office/drawing/2014/main" id="{BB3E402C-E399-49E8-A1A7-081F16FDA076}"/>
               </a:ext>
             </a:extLst>
           </p:cNvPr>
@@ -9515,7 +9523,7 @@
           <p:cNvPr id="9" name="">
             <a:extLst xmlns:a="http://schemas.openxmlformats.org/drawingml/2006/main">
               <a:ext uri="{FF2B5EF4-FFF2-40B4-BE49-F238E27FC236}">
-                <a16:creationId xmlns:a16="http://schemas.microsoft.com/office/drawing/2014/main" id="{292E5291-8769-4CFF-9484-FFB2396D936B}"/>
+                <a16:creationId xmlns:a16="http://schemas.microsoft.com/office/drawing/2014/main" id="{442FD7DC-F6E5-4054-94AB-C87712200CD9}"/>
               </a:ext>
             </a:extLst>
           </p:cNvPr>
@@ -9572,7 +9580,7 @@
           <p:cNvPr id="10" name="">
             <a:extLst xmlns:a="http://schemas.openxmlformats.org/drawingml/2006/main">
               <a:ext uri="{FF2B5EF4-FFF2-40B4-BE49-F238E27FC236}">
-                <a16:creationId xmlns:a16="http://schemas.microsoft.com/office/drawing/2014/main" id="{478848CB-11A9-4763-BB31-344A9EF2C632}"/>
+                <a16:creationId xmlns:a16="http://schemas.microsoft.com/office/drawing/2014/main" id="{AEA4C95E-F23A-4FAD-80AA-B652924571D6}"/>
               </a:ext>
             </a:extLst>
           </p:cNvPr>
@@ -9629,7 +9637,7 @@
           <p:cNvPr id="11" name="">
             <a:extLst xmlns:a="http://schemas.openxmlformats.org/drawingml/2006/main">
               <a:ext uri="{FF2B5EF4-FFF2-40B4-BE49-F238E27FC236}">
-                <a16:creationId xmlns:a16="http://schemas.microsoft.com/office/drawing/2014/main" id="{22A15E7E-8F47-4EAD-AB22-45055D67FA49}"/>
+                <a16:creationId xmlns:a16="http://schemas.microsoft.com/office/drawing/2014/main" id="{98B63989-B9BB-499D-82D4-4E11C4ACFAA1}"/>
               </a:ext>
             </a:extLst>
           </p:cNvPr>
@@ -9686,7 +9694,7 @@
           <p:cNvPr id="12" name="">
             <a:extLst xmlns:a="http://schemas.openxmlformats.org/drawingml/2006/main">
               <a:ext uri="{FF2B5EF4-FFF2-40B4-BE49-F238E27FC236}">
-                <a16:creationId xmlns:a16="http://schemas.microsoft.com/office/drawing/2014/main" id="{8F95D1D8-819C-4AFB-86B4-6DB748C7D43A}"/>
+                <a16:creationId xmlns:a16="http://schemas.microsoft.com/office/drawing/2014/main" id="{13C107E4-1822-4BAE-BC41-B197BEF7527F}"/>
               </a:ext>
             </a:extLst>
           </p:cNvPr>
@@ -9718,7 +9726,7 @@
           <p:cNvPr id="13" name="">
             <a:extLst xmlns:a="http://schemas.openxmlformats.org/drawingml/2006/main">
               <a:ext uri="{FF2B5EF4-FFF2-40B4-BE49-F238E27FC236}">
-                <a16:creationId xmlns:a16="http://schemas.microsoft.com/office/drawing/2014/main" id="{792B7AA9-E847-453D-AB72-DB3244E8D650}"/>
+                <a16:creationId xmlns:a16="http://schemas.microsoft.com/office/drawing/2014/main" id="{5B59EF29-12CF-42D4-820B-40613EE7F50F}"/>
               </a:ext>
             </a:extLst>
           </p:cNvPr>
@@ -9775,7 +9783,7 @@
           <p:cNvPr id="14" name="">
             <a:extLst xmlns:a="http://schemas.openxmlformats.org/drawingml/2006/main">
               <a:ext uri="{FF2B5EF4-FFF2-40B4-BE49-F238E27FC236}">
-                <a16:creationId xmlns:a16="http://schemas.microsoft.com/office/drawing/2014/main" id="{0796FC4A-6726-41E3-BA53-95B5C7F328B8}"/>
+                <a16:creationId xmlns:a16="http://schemas.microsoft.com/office/drawing/2014/main" id="{3B8895B0-A331-4934-839D-71D49D0A0563}"/>
               </a:ext>
             </a:extLst>
           </p:cNvPr>
@@ -9830,7 +9838,7 @@
     </p:spTree>
     <p:extLst>
       <p:ext uri="{BB962C8B-B14F-4D97-AF65-F5344CB8AC3E}">
-        <p14:creationId xmlns:p14="http://schemas.microsoft.com/office/powerpoint/2010/main" val="568910987"/>
+        <p14:creationId xmlns:p14="http://schemas.microsoft.com/office/powerpoint/2010/main" val="1181004931"/>
       </p:ext>
     </p:extLst>
   </p:cSld>
@@ -10031,7 +10039,7 @@
           <p:cNvPr id="16" name="">
             <a:extLst xmlns:a="http://schemas.openxmlformats.org/drawingml/2006/main">
               <a:ext uri="{FF2B5EF4-FFF2-40B4-BE49-F238E27FC236}">
-                <a16:creationId xmlns:a16="http://schemas.microsoft.com/office/drawing/2014/main" id="{0B281916-471E-4FF2-9D0D-C6F1CB15B744}"/>
+                <a16:creationId xmlns:a16="http://schemas.microsoft.com/office/drawing/2014/main" id="{434301C9-74CC-4058-A636-801C38164080}"/>
               </a:ext>
             </a:extLst>
           </p:cNvPr>
@@ -10063,7 +10071,7 @@
           <p:cNvPr id="2" name="">
             <a:extLst xmlns:a="http://schemas.openxmlformats.org/drawingml/2006/main">
               <a:ext uri="{FF2B5EF4-FFF2-40B4-BE49-F238E27FC236}">
-                <a16:creationId xmlns:a16="http://schemas.microsoft.com/office/drawing/2014/main" id="{C0698E92-1324-4219-A2FA-DB65BF695AEA}"/>
+                <a16:creationId xmlns:a16="http://schemas.microsoft.com/office/drawing/2014/main" id="{073598C5-0FCE-4BFD-921F-50572B26F11E}"/>
               </a:ext>
             </a:extLst>
           </p:cNvPr>
@@ -10120,7 +10128,7 @@
           <p:cNvPr id="3" name="">
             <a:extLst xmlns:a="http://schemas.openxmlformats.org/drawingml/2006/main">
               <a:ext uri="{FF2B5EF4-FFF2-40B4-BE49-F238E27FC236}">
-                <a16:creationId xmlns:a16="http://schemas.microsoft.com/office/drawing/2014/main" id="{025E49EA-125B-4507-99B2-7F8082957441}"/>
+                <a16:creationId xmlns:a16="http://schemas.microsoft.com/office/drawing/2014/main" id="{4E1BAB3D-34A7-47EF-88A6-9E18DF0D4350}"/>
               </a:ext>
             </a:extLst>
           </p:cNvPr>
@@ -10152,7 +10160,7 @@
           <p:cNvPr id="4" name="">
             <a:extLst xmlns:a="http://schemas.openxmlformats.org/drawingml/2006/main">
               <a:ext uri="{FF2B5EF4-FFF2-40B4-BE49-F238E27FC236}">
-                <a16:creationId xmlns:a16="http://schemas.microsoft.com/office/drawing/2014/main" id="{DA6A0654-9A94-4013-BE6E-87213A84EF8E}"/>
+                <a16:creationId xmlns:a16="http://schemas.microsoft.com/office/drawing/2014/main" id="{0CD2BECF-2C6C-41A1-8BE6-C31F61C95783}"/>
               </a:ext>
             </a:extLst>
           </p:cNvPr>
@@ -10209,7 +10217,7 @@
           <p:cNvPr id="5" name="">
             <a:extLst xmlns:a="http://schemas.openxmlformats.org/drawingml/2006/main">
               <a:ext uri="{FF2B5EF4-FFF2-40B4-BE49-F238E27FC236}">
-                <a16:creationId xmlns:a16="http://schemas.microsoft.com/office/drawing/2014/main" id="{F0C4B71E-7F78-4204-BA2E-7CF04F36C74E}"/>
+                <a16:creationId xmlns:a16="http://schemas.microsoft.com/office/drawing/2014/main" id="{43B31EA1-5C72-45F0-B1B9-5FF8942A58DE}"/>
               </a:ext>
             </a:extLst>
           </p:cNvPr>
@@ -10266,7 +10274,7 @@
           <p:cNvPr id="6" name="">
             <a:extLst xmlns:a="http://schemas.openxmlformats.org/drawingml/2006/main">
               <a:ext uri="{FF2B5EF4-FFF2-40B4-BE49-F238E27FC236}">
-                <a16:creationId xmlns:a16="http://schemas.microsoft.com/office/drawing/2014/main" id="{49A9236E-DF5A-4EA5-A304-87F97A5371D2}"/>
+                <a16:creationId xmlns:a16="http://schemas.microsoft.com/office/drawing/2014/main" id="{7019C5FB-FC26-4F0B-ACFB-099E8DE43227}"/>
               </a:ext>
             </a:extLst>
           </p:cNvPr>
@@ -10323,7 +10331,7 @@
           <p:cNvPr id="7" name="">
             <a:extLst xmlns:a="http://schemas.openxmlformats.org/drawingml/2006/main">
               <a:ext uri="{FF2B5EF4-FFF2-40B4-BE49-F238E27FC236}">
-                <a16:creationId xmlns:a16="http://schemas.microsoft.com/office/drawing/2014/main" id="{28EDBDBA-8B50-4FC0-AF2E-14DBF9D926AC}"/>
+                <a16:creationId xmlns:a16="http://schemas.microsoft.com/office/drawing/2014/main" id="{387B4EA8-9BC8-4F86-8101-D66196C6F384}"/>
               </a:ext>
             </a:extLst>
           </p:cNvPr>
@@ -10355,7 +10363,7 @@
           <p:cNvPr id="8" name="">
             <a:extLst xmlns:a="http://schemas.openxmlformats.org/drawingml/2006/main">
               <a:ext uri="{FF2B5EF4-FFF2-40B4-BE49-F238E27FC236}">
-                <a16:creationId xmlns:a16="http://schemas.microsoft.com/office/drawing/2014/main" id="{5756F5C9-8F52-4C77-969E-8D626307E8F7}"/>
+                <a16:creationId xmlns:a16="http://schemas.microsoft.com/office/drawing/2014/main" id="{4327AA74-6F0F-4B1C-B38F-D9A97619C95E}"/>
               </a:ext>
             </a:extLst>
           </p:cNvPr>
@@ -10412,7 +10420,7 @@
           <p:cNvPr id="9" name="">
             <a:extLst xmlns:a="http://schemas.openxmlformats.org/drawingml/2006/main">
               <a:ext uri="{FF2B5EF4-FFF2-40B4-BE49-F238E27FC236}">
-                <a16:creationId xmlns:a16="http://schemas.microsoft.com/office/drawing/2014/main" id="{92F1258C-60BC-431A-ADEB-681144433480}"/>
+                <a16:creationId xmlns:a16="http://schemas.microsoft.com/office/drawing/2014/main" id="{815DA07F-5218-473F-9D66-78AE5AEAF521}"/>
               </a:ext>
             </a:extLst>
           </p:cNvPr>
@@ -10469,7 +10477,7 @@
           <p:cNvPr id="10" name="">
             <a:extLst xmlns:a="http://schemas.openxmlformats.org/drawingml/2006/main">
               <a:ext uri="{FF2B5EF4-FFF2-40B4-BE49-F238E27FC236}">
-                <a16:creationId xmlns:a16="http://schemas.microsoft.com/office/drawing/2014/main" id="{B9F53DBD-C0DD-447C-8BA9-27F7198EFB18}"/>
+                <a16:creationId xmlns:a16="http://schemas.microsoft.com/office/drawing/2014/main" id="{CAF43A42-DD28-4CEB-8CB0-16C4FA90BD76}"/>
               </a:ext>
             </a:extLst>
           </p:cNvPr>
@@ -10526,7 +10534,7 @@
           <p:cNvPr id="11" name="">
             <a:extLst xmlns:a="http://schemas.openxmlformats.org/drawingml/2006/main">
               <a:ext uri="{FF2B5EF4-FFF2-40B4-BE49-F238E27FC236}">
-                <a16:creationId xmlns:a16="http://schemas.microsoft.com/office/drawing/2014/main" id="{B3BDE982-6756-426E-B1B8-7385E4D1EF02}"/>
+                <a16:creationId xmlns:a16="http://schemas.microsoft.com/office/drawing/2014/main" id="{445B8091-F62B-4621-9A4A-60B90B30739C}"/>
               </a:ext>
             </a:extLst>
           </p:cNvPr>
@@ -10583,7 +10591,7 @@
           <p:cNvPr id="12" name="">
             <a:extLst xmlns:a="http://schemas.openxmlformats.org/drawingml/2006/main">
               <a:ext uri="{FF2B5EF4-FFF2-40B4-BE49-F238E27FC236}">
-                <a16:creationId xmlns:a16="http://schemas.microsoft.com/office/drawing/2014/main" id="{710EE0BF-F1E8-4BF0-8A61-69D61034BED4}"/>
+                <a16:creationId xmlns:a16="http://schemas.microsoft.com/office/drawing/2014/main" id="{52DC3307-4F0C-4448-8878-FFC74844BEAE}"/>
               </a:ext>
             </a:extLst>
           </p:cNvPr>
@@ -10640,7 +10648,7 @@
           <p:cNvPr id="13" name="">
             <a:extLst xmlns:a="http://schemas.openxmlformats.org/drawingml/2006/main">
               <a:ext uri="{FF2B5EF4-FFF2-40B4-BE49-F238E27FC236}">
-                <a16:creationId xmlns:a16="http://schemas.microsoft.com/office/drawing/2014/main" id="{7428ECD8-4384-42D0-8A74-D4266F236F85}"/>
+                <a16:creationId xmlns:a16="http://schemas.microsoft.com/office/drawing/2014/main" id="{EC2DA55D-7EE4-43C6-914F-BD807145FD84}"/>
               </a:ext>
             </a:extLst>
           </p:cNvPr>
@@ -10697,7 +10705,7 @@
           <p:cNvPr id="14" name="">
             <a:extLst xmlns:a="http://schemas.openxmlformats.org/drawingml/2006/main">
               <a:ext uri="{FF2B5EF4-FFF2-40B4-BE49-F238E27FC236}">
-                <a16:creationId xmlns:a16="http://schemas.microsoft.com/office/drawing/2014/main" id="{48FFEBE6-F15F-4B6E-9A42-C6A7BC37E55F}"/>
+                <a16:creationId xmlns:a16="http://schemas.microsoft.com/office/drawing/2014/main" id="{210B8EB8-6E37-4FEA-B36E-A7B8F165FA13}"/>
               </a:ext>
             </a:extLst>
           </p:cNvPr>
@@ -10754,7 +10762,7 @@
           <p:cNvPr id="15" name="">
             <a:extLst xmlns:a="http://schemas.openxmlformats.org/drawingml/2006/main">
               <a:ext uri="{FF2B5EF4-FFF2-40B4-BE49-F238E27FC236}">
-                <a16:creationId xmlns:a16="http://schemas.microsoft.com/office/drawing/2014/main" id="{7A2AD884-5F94-41F4-AEC5-B718DEFC674B}"/>
+                <a16:creationId xmlns:a16="http://schemas.microsoft.com/office/drawing/2014/main" id="{31607EE8-17CE-4BE7-BC99-4C2452CD09E6}"/>
               </a:ext>
             </a:extLst>
           </p:cNvPr>
@@ -10809,7 +10817,7 @@
     </p:spTree>
     <p:extLst>
       <p:ext uri="{BB962C8B-B14F-4D97-AF65-F5344CB8AC3E}">
-        <p14:creationId xmlns:p14="http://schemas.microsoft.com/office/powerpoint/2010/main" val="86489777"/>
+        <p14:creationId xmlns:p14="http://schemas.microsoft.com/office/powerpoint/2010/main" val="353979153"/>
       </p:ext>
     </p:extLst>
   </p:cSld>
@@ -10964,7 +10972,7 @@
           <p:cNvPr id="16" name="">
             <a:extLst xmlns:a="http://schemas.openxmlformats.org/drawingml/2006/main">
               <a:ext uri="{FF2B5EF4-FFF2-40B4-BE49-F238E27FC236}">
-                <a16:creationId xmlns:a16="http://schemas.microsoft.com/office/drawing/2014/main" id="{AAAE1AB1-0BE9-45C1-BD2D-07516FDF4B19}"/>
+                <a16:creationId xmlns:a16="http://schemas.microsoft.com/office/drawing/2014/main" id="{42EC906B-A43F-468D-9324-3CA911AB5BCB}"/>
               </a:ext>
             </a:extLst>
           </p:cNvPr>
@@ -10996,7 +11004,7 @@
           <p:cNvPr id="2" name="">
             <a:extLst xmlns:a="http://schemas.openxmlformats.org/drawingml/2006/main">
               <a:ext uri="{FF2B5EF4-FFF2-40B4-BE49-F238E27FC236}">
-                <a16:creationId xmlns:a16="http://schemas.microsoft.com/office/drawing/2014/main" id="{69C05361-58E2-4D03-8523-72202C538983}"/>
+                <a16:creationId xmlns:a16="http://schemas.microsoft.com/office/drawing/2014/main" id="{D7C1850E-EE29-4E97-B352-B8B9BE1B8A6D}"/>
               </a:ext>
             </a:extLst>
           </p:cNvPr>
@@ -11053,7 +11061,7 @@
           <p:cNvPr id="3" name="">
             <a:extLst xmlns:a="http://schemas.openxmlformats.org/drawingml/2006/main">
               <a:ext uri="{FF2B5EF4-FFF2-40B4-BE49-F238E27FC236}">
-                <a16:creationId xmlns:a16="http://schemas.microsoft.com/office/drawing/2014/main" id="{BB473C01-811E-4393-ACCB-21CE3CCEA5B6}"/>
+                <a16:creationId xmlns:a16="http://schemas.microsoft.com/office/drawing/2014/main" id="{FF720EB8-A33B-48AD-AC0E-D9D0AAD9BDD2}"/>
               </a:ext>
             </a:extLst>
           </p:cNvPr>
@@ -11085,7 +11093,7 @@
           <p:cNvPr id="4" name="">
             <a:extLst xmlns:a="http://schemas.openxmlformats.org/drawingml/2006/main">
               <a:ext uri="{FF2B5EF4-FFF2-40B4-BE49-F238E27FC236}">
-                <a16:creationId xmlns:a16="http://schemas.microsoft.com/office/drawing/2014/main" id="{56674703-5A30-44D5-A3B5-874DB32C51E6}"/>
+                <a16:creationId xmlns:a16="http://schemas.microsoft.com/office/drawing/2014/main" id="{94174C9B-0D47-41E8-BB9C-8540A528704E}"/>
               </a:ext>
             </a:extLst>
           </p:cNvPr>
@@ -11142,7 +11150,7 @@
           <p:cNvPr id="5" name="">
             <a:extLst xmlns:a="http://schemas.openxmlformats.org/drawingml/2006/main">
               <a:ext uri="{FF2B5EF4-FFF2-40B4-BE49-F238E27FC236}">
-                <a16:creationId xmlns:a16="http://schemas.microsoft.com/office/drawing/2014/main" id="{D48821CE-6541-4440-B3CD-7922D35DD7C7}"/>
+                <a16:creationId xmlns:a16="http://schemas.microsoft.com/office/drawing/2014/main" id="{31C875E1-261A-4E5F-91BF-4065B14D940B}"/>
               </a:ext>
             </a:extLst>
           </p:cNvPr>
@@ -11199,7 +11207,7 @@
           <p:cNvPr id="6" name="">
             <a:extLst xmlns:a="http://schemas.openxmlformats.org/drawingml/2006/main">
               <a:ext uri="{FF2B5EF4-FFF2-40B4-BE49-F238E27FC236}">
-                <a16:creationId xmlns:a16="http://schemas.microsoft.com/office/drawing/2014/main" id="{6FAB9ADB-CFFE-4764-8CE5-B707D57261EE}"/>
+                <a16:creationId xmlns:a16="http://schemas.microsoft.com/office/drawing/2014/main" id="{AA603F91-3C97-46DC-9CF1-7FF0938BA427}"/>
               </a:ext>
             </a:extLst>
           </p:cNvPr>
@@ -11256,7 +11264,7 @@
           <p:cNvPr id="7" name="">
             <a:extLst xmlns:a="http://schemas.openxmlformats.org/drawingml/2006/main">
               <a:ext uri="{FF2B5EF4-FFF2-40B4-BE49-F238E27FC236}">
-                <a16:creationId xmlns:a16="http://schemas.microsoft.com/office/drawing/2014/main" id="{ACF63CA8-4090-4AD1-A043-30642F3B2855}"/>
+                <a16:creationId xmlns:a16="http://schemas.microsoft.com/office/drawing/2014/main" id="{DF5775E9-A23E-40F7-BDC8-E073F1F0A5BF}"/>
               </a:ext>
             </a:extLst>
           </p:cNvPr>
@@ -11288,7 +11296,7 @@
           <p:cNvPr id="8" name="">
             <a:extLst xmlns:a="http://schemas.openxmlformats.org/drawingml/2006/main">
               <a:ext uri="{FF2B5EF4-FFF2-40B4-BE49-F238E27FC236}">
-                <a16:creationId xmlns:a16="http://schemas.microsoft.com/office/drawing/2014/main" id="{257D151C-5812-4DEA-9900-6FAAB05EBC7F}"/>
+                <a16:creationId xmlns:a16="http://schemas.microsoft.com/office/drawing/2014/main" id="{64D81B19-739E-42DC-89D8-F99A143E1960}"/>
               </a:ext>
             </a:extLst>
           </p:cNvPr>
@@ -11345,7 +11353,7 @@
           <p:cNvPr id="9" name="">
             <a:extLst xmlns:a="http://schemas.openxmlformats.org/drawingml/2006/main">
               <a:ext uri="{FF2B5EF4-FFF2-40B4-BE49-F238E27FC236}">
-                <a16:creationId xmlns:a16="http://schemas.microsoft.com/office/drawing/2014/main" id="{2874C37D-6325-498D-9BF9-9456C4B0FADA}"/>
+                <a16:creationId xmlns:a16="http://schemas.microsoft.com/office/drawing/2014/main" id="{A76E64B2-4699-4193-ADBB-E17FEC6EE614}"/>
               </a:ext>
             </a:extLst>
           </p:cNvPr>
@@ -11406,7 +11414,7 @@
           <p:nvPr/>
         </p:nvPicPr>
         <p:blipFill>
-          <a:blip xmlns:r="http://schemas.openxmlformats.org/officeDocument/2006/relationships" xmlns:a="http://schemas.openxmlformats.org/drawingml/2006/main" r:embed="R48792a34e2b245c6"/>
+          <a:blip xmlns:r="http://schemas.openxmlformats.org/officeDocument/2006/relationships" xmlns:a="http://schemas.openxmlformats.org/drawingml/2006/main" r:embed="R85375342f1524741"/>
           <a:stretch xmlns:a="http://schemas.openxmlformats.org/drawingml/2006/main"/>
         </p:blipFill>
         <p:spPr>
@@ -11424,7 +11432,7 @@
           <p:cNvPr id="11" name="">
             <a:extLst xmlns:a="http://schemas.openxmlformats.org/drawingml/2006/main">
               <a:ext uri="{FF2B5EF4-FFF2-40B4-BE49-F238E27FC236}">
-                <a16:creationId xmlns:a16="http://schemas.microsoft.com/office/drawing/2014/main" id="{7D54B2A7-B33E-497E-9AC1-3020ABB6F88F}"/>
+                <a16:creationId xmlns:a16="http://schemas.microsoft.com/office/drawing/2014/main" id="{7DBEFC71-20EF-43A3-8D0A-D1F3045E6F40}"/>
               </a:ext>
             </a:extLst>
           </p:cNvPr>
@@ -11481,7 +11489,7 @@
           <p:cNvPr id="12" name="">
             <a:extLst xmlns:a="http://schemas.openxmlformats.org/drawingml/2006/main">
               <a:ext uri="{FF2B5EF4-FFF2-40B4-BE49-F238E27FC236}">
-                <a16:creationId xmlns:a16="http://schemas.microsoft.com/office/drawing/2014/main" id="{53F5BC06-91C1-4637-8E2F-B13469986E86}"/>
+                <a16:creationId xmlns:a16="http://schemas.microsoft.com/office/drawing/2014/main" id="{DBF604FC-396C-4FC1-924A-8FF7068DE574}"/>
               </a:ext>
             </a:extLst>
           </p:cNvPr>
@@ -11538,7 +11546,7 @@
           <p:cNvPr id="13" name="">
             <a:extLst xmlns:a="http://schemas.openxmlformats.org/drawingml/2006/main">
               <a:ext uri="{FF2B5EF4-FFF2-40B4-BE49-F238E27FC236}">
-                <a16:creationId xmlns:a16="http://schemas.microsoft.com/office/drawing/2014/main" id="{4C625670-E4A9-4B99-AC1E-EF372119F597}"/>
+                <a16:creationId xmlns:a16="http://schemas.microsoft.com/office/drawing/2014/main" id="{646E90B1-B89C-4EFC-8DFD-4EBAACB9A4EE}"/>
               </a:ext>
             </a:extLst>
           </p:cNvPr>
@@ -11570,7 +11578,7 @@
           <p:cNvPr id="14" name="">
             <a:extLst xmlns:a="http://schemas.openxmlformats.org/drawingml/2006/main">
               <a:ext uri="{FF2B5EF4-FFF2-40B4-BE49-F238E27FC236}">
-                <a16:creationId xmlns:a16="http://schemas.microsoft.com/office/drawing/2014/main" id="{E7A36798-CD5B-4CA8-990B-54ED06C9F71F}"/>
+                <a16:creationId xmlns:a16="http://schemas.microsoft.com/office/drawing/2014/main" id="{618AB8CD-B98B-4F5E-ACB4-6FD798350CCA}"/>
               </a:ext>
             </a:extLst>
           </p:cNvPr>
@@ -11627,7 +11635,7 @@
           <p:cNvPr id="15" name="">
             <a:extLst xmlns:a="http://schemas.openxmlformats.org/drawingml/2006/main">
               <a:ext uri="{FF2B5EF4-FFF2-40B4-BE49-F238E27FC236}">
-                <a16:creationId xmlns:a16="http://schemas.microsoft.com/office/drawing/2014/main" id="{5811B3D6-DB1A-4D4E-BC90-9424E0479666}"/>
+                <a16:creationId xmlns:a16="http://schemas.microsoft.com/office/drawing/2014/main" id="{ECABF5A3-193D-46A8-8047-50AB0F7DA6F6}"/>
               </a:ext>
             </a:extLst>
           </p:cNvPr>
@@ -11682,7 +11690,7 @@
     </p:spTree>
     <p:extLst>
       <p:ext uri="{BB962C8B-B14F-4D97-AF65-F5344CB8AC3E}">
-        <p14:creationId xmlns:p14="http://schemas.microsoft.com/office/powerpoint/2010/main" val="332258925"/>
+        <p14:creationId xmlns:p14="http://schemas.microsoft.com/office/powerpoint/2010/main" val="1863511160"/>
       </p:ext>
     </p:extLst>
   </p:cSld>
@@ -11837,7 +11845,7 @@
           <p:cNvPr id="23" name="">
             <a:extLst xmlns:a="http://schemas.openxmlformats.org/drawingml/2006/main">
               <a:ext uri="{FF2B5EF4-FFF2-40B4-BE49-F238E27FC236}">
-                <a16:creationId xmlns:a16="http://schemas.microsoft.com/office/drawing/2014/main" id="{E9916AF8-ED8B-4F81-B29A-989C6D6E2ACE}"/>
+                <a16:creationId xmlns:a16="http://schemas.microsoft.com/office/drawing/2014/main" id="{A5F2CF6A-3F17-41D8-96B4-719D99A12C39}"/>
               </a:ext>
             </a:extLst>
           </p:cNvPr>
@@ -11869,7 +11877,7 @@
           <p:cNvPr id="2" name="">
             <a:extLst xmlns:a="http://schemas.openxmlformats.org/drawingml/2006/main">
               <a:ext uri="{FF2B5EF4-FFF2-40B4-BE49-F238E27FC236}">
-                <a16:creationId xmlns:a16="http://schemas.microsoft.com/office/drawing/2014/main" id="{E6A4E399-522B-4BEF-B93E-927D6A00FF1C}"/>
+                <a16:creationId xmlns:a16="http://schemas.microsoft.com/office/drawing/2014/main" id="{1A729EBB-6C14-4908-9BAB-9E63DEB96A7D}"/>
               </a:ext>
             </a:extLst>
           </p:cNvPr>
@@ -11926,7 +11934,7 @@
           <p:cNvPr id="3" name="">
             <a:extLst xmlns:a="http://schemas.openxmlformats.org/drawingml/2006/main">
               <a:ext uri="{FF2B5EF4-FFF2-40B4-BE49-F238E27FC236}">
-                <a16:creationId xmlns:a16="http://schemas.microsoft.com/office/drawing/2014/main" id="{13D1CCC1-4FBC-4DB5-8F96-6F72EAF1E7B6}"/>
+                <a16:creationId xmlns:a16="http://schemas.microsoft.com/office/drawing/2014/main" id="{7B5A68EB-00A4-41CA-B611-20E6C98C7498}"/>
               </a:ext>
             </a:extLst>
           </p:cNvPr>
@@ -11958,7 +11966,7 @@
           <p:cNvPr id="4" name="">
             <a:extLst xmlns:a="http://schemas.openxmlformats.org/drawingml/2006/main">
               <a:ext uri="{FF2B5EF4-FFF2-40B4-BE49-F238E27FC236}">
-                <a16:creationId xmlns:a16="http://schemas.microsoft.com/office/drawing/2014/main" id="{17B25331-F3B4-4CCE-8421-BE368584E63D}"/>
+                <a16:creationId xmlns:a16="http://schemas.microsoft.com/office/drawing/2014/main" id="{D7FDF9D4-9040-4290-B1CB-444EFC97F551}"/>
               </a:ext>
             </a:extLst>
           </p:cNvPr>
@@ -12015,7 +12023,7 @@
           <p:cNvPr id="5" name="">
             <a:extLst xmlns:a="http://schemas.openxmlformats.org/drawingml/2006/main">
               <a:ext uri="{FF2B5EF4-FFF2-40B4-BE49-F238E27FC236}">
-                <a16:creationId xmlns:a16="http://schemas.microsoft.com/office/drawing/2014/main" id="{6B75F0C2-1B27-448A-A65D-4A110C9FB9D5}"/>
+                <a16:creationId xmlns:a16="http://schemas.microsoft.com/office/drawing/2014/main" id="{63F6B87E-F01D-4EA4-9692-6D430F203B6C}"/>
               </a:ext>
             </a:extLst>
           </p:cNvPr>
@@ -12072,7 +12080,7 @@
           <p:cNvPr id="6" name="">
             <a:extLst xmlns:a="http://schemas.openxmlformats.org/drawingml/2006/main">
               <a:ext uri="{FF2B5EF4-FFF2-40B4-BE49-F238E27FC236}">
-                <a16:creationId xmlns:a16="http://schemas.microsoft.com/office/drawing/2014/main" id="{53A4E008-061D-43B0-81F4-9996274CC856}"/>
+                <a16:creationId xmlns:a16="http://schemas.microsoft.com/office/drawing/2014/main" id="{F6C1491A-6D60-41E8-9FA2-2923AA5C02D5}"/>
               </a:ext>
             </a:extLst>
           </p:cNvPr>
@@ -12129,7 +12137,7 @@
           <p:cNvPr id="7" name="">
             <a:extLst xmlns:a="http://schemas.openxmlformats.org/drawingml/2006/main">
               <a:ext uri="{FF2B5EF4-FFF2-40B4-BE49-F238E27FC236}">
-                <a16:creationId xmlns:a16="http://schemas.microsoft.com/office/drawing/2014/main" id="{AEA7AEB7-4EAC-4A97-BA3F-D881BA17D8D0}"/>
+                <a16:creationId xmlns:a16="http://schemas.microsoft.com/office/drawing/2014/main" id="{08BD1766-89A9-40E2-853A-5EEF5ED64887}"/>
               </a:ext>
             </a:extLst>
           </p:cNvPr>
@@ -12161,7 +12169,7 @@
           <p:cNvPr id="8" name="">
             <a:extLst xmlns:a="http://schemas.openxmlformats.org/drawingml/2006/main">
               <a:ext uri="{FF2B5EF4-FFF2-40B4-BE49-F238E27FC236}">
-                <a16:creationId xmlns:a16="http://schemas.microsoft.com/office/drawing/2014/main" id="{D772F72E-1DDD-4326-B4B9-2C2DAC3FA785}"/>
+                <a16:creationId xmlns:a16="http://schemas.microsoft.com/office/drawing/2014/main" id="{FA6D7BA1-0573-4D52-ADDC-496A7BE9E545}"/>
               </a:ext>
             </a:extLst>
           </p:cNvPr>
@@ -12218,7 +12226,7 @@
           <p:cNvPr id="9" name="">
             <a:extLst xmlns:a="http://schemas.openxmlformats.org/drawingml/2006/main">
               <a:ext uri="{FF2B5EF4-FFF2-40B4-BE49-F238E27FC236}">
-                <a16:creationId xmlns:a16="http://schemas.microsoft.com/office/drawing/2014/main" id="{B2CA4753-ED9E-4007-8C62-41CCBD3E3653}"/>
+                <a16:creationId xmlns:a16="http://schemas.microsoft.com/office/drawing/2014/main" id="{A37C71ED-1667-48A7-8168-AF4A9977B3FC}"/>
               </a:ext>
             </a:extLst>
           </p:cNvPr>
@@ -12275,7 +12283,7 @@
           <p:cNvPr id="10" name="">
             <a:extLst xmlns:a="http://schemas.openxmlformats.org/drawingml/2006/main">
               <a:ext uri="{FF2B5EF4-FFF2-40B4-BE49-F238E27FC236}">
-                <a16:creationId xmlns:a16="http://schemas.microsoft.com/office/drawing/2014/main" id="{640B8CE9-CE5C-4003-A9F9-DEB92DE86D7F}"/>
+                <a16:creationId xmlns:a16="http://schemas.microsoft.com/office/drawing/2014/main" id="{20502263-6402-4401-A0E8-D18245B5844F}"/>
               </a:ext>
             </a:extLst>
           </p:cNvPr>
@@ -12309,7 +12317,7 @@
           <p:cNvPr id="11" name="">
             <a:extLst xmlns:a="http://schemas.openxmlformats.org/drawingml/2006/main">
               <a:ext uri="{FF2B5EF4-FFF2-40B4-BE49-F238E27FC236}">
-                <a16:creationId xmlns:a16="http://schemas.microsoft.com/office/drawing/2014/main" id="{3DE6EA49-B4FC-4018-B837-5579D1D7EADF}"/>
+                <a16:creationId xmlns:a16="http://schemas.microsoft.com/office/drawing/2014/main" id="{6DFDD238-A84C-417B-983E-B629E06EA431}"/>
               </a:ext>
             </a:extLst>
           </p:cNvPr>
@@ -12341,7 +12349,7 @@
           <p:cNvPr id="12" name="">
             <a:extLst xmlns:a="http://schemas.openxmlformats.org/drawingml/2006/main">
               <a:ext uri="{FF2B5EF4-FFF2-40B4-BE49-F238E27FC236}">
-                <a16:creationId xmlns:a16="http://schemas.microsoft.com/office/drawing/2014/main" id="{C1F663F1-9030-42E2-8F2E-E9A2E0E0F0BE}"/>
+                <a16:creationId xmlns:a16="http://schemas.microsoft.com/office/drawing/2014/main" id="{71BF27F8-5219-416D-824A-C0BDC36FEB7D}"/>
               </a:ext>
             </a:extLst>
           </p:cNvPr>
@@ -12398,7 +12406,7 @@
           <p:cNvPr id="13" name="">
             <a:extLst xmlns:a="http://schemas.openxmlformats.org/drawingml/2006/main">
               <a:ext uri="{FF2B5EF4-FFF2-40B4-BE49-F238E27FC236}">
-                <a16:creationId xmlns:a16="http://schemas.microsoft.com/office/drawing/2014/main" id="{E4CAD001-E933-4F52-8161-78051D5B4C9C}"/>
+                <a16:creationId xmlns:a16="http://schemas.microsoft.com/office/drawing/2014/main" id="{6EDEC771-E7D3-4F7C-8E86-307F2B9CBA91}"/>
               </a:ext>
             </a:extLst>
           </p:cNvPr>
@@ -12455,7 +12463,7 @@
           <p:cNvPr id="14" name="">
             <a:extLst xmlns:a="http://schemas.openxmlformats.org/drawingml/2006/main">
               <a:ext uri="{FF2B5EF4-FFF2-40B4-BE49-F238E27FC236}">
-                <a16:creationId xmlns:a16="http://schemas.microsoft.com/office/drawing/2014/main" id="{64DFE27B-F87B-481F-A3EF-F4AF1C5DBCA8}"/>
+                <a16:creationId xmlns:a16="http://schemas.microsoft.com/office/drawing/2014/main" id="{F64950F9-CF25-46CE-A1E1-D53C48D5EBA3}"/>
               </a:ext>
             </a:extLst>
           </p:cNvPr>
@@ -12489,7 +12497,7 @@
           <p:cNvPr id="15" name="">
             <a:extLst xmlns:a="http://schemas.openxmlformats.org/drawingml/2006/main">
               <a:ext uri="{FF2B5EF4-FFF2-40B4-BE49-F238E27FC236}">
-                <a16:creationId xmlns:a16="http://schemas.microsoft.com/office/drawing/2014/main" id="{5D28FA54-7716-4B5B-BDBE-AFFAB746283D}"/>
+                <a16:creationId xmlns:a16="http://schemas.microsoft.com/office/drawing/2014/main" id="{A5DE092A-40CD-40D8-8668-6E7E73866220}"/>
               </a:ext>
             </a:extLst>
           </p:cNvPr>
@@ -12521,7 +12529,7 @@
           <p:cNvPr id="16" name="">
             <a:extLst xmlns:a="http://schemas.openxmlformats.org/drawingml/2006/main">
               <a:ext uri="{FF2B5EF4-FFF2-40B4-BE49-F238E27FC236}">
-                <a16:creationId xmlns:a16="http://schemas.microsoft.com/office/drawing/2014/main" id="{14986995-03CA-402D-A155-22204CF51FD4}"/>
+                <a16:creationId xmlns:a16="http://schemas.microsoft.com/office/drawing/2014/main" id="{8B844667-60BD-4F87-888F-0CD53752E2E5}"/>
               </a:ext>
             </a:extLst>
           </p:cNvPr>
@@ -12578,7 +12586,7 @@
           <p:cNvPr id="17" name="">
             <a:extLst xmlns:a="http://schemas.openxmlformats.org/drawingml/2006/main">
               <a:ext uri="{FF2B5EF4-FFF2-40B4-BE49-F238E27FC236}">
-                <a16:creationId xmlns:a16="http://schemas.microsoft.com/office/drawing/2014/main" id="{72C622B3-3F80-4386-8A63-B20F86DBDE83}"/>
+                <a16:creationId xmlns:a16="http://schemas.microsoft.com/office/drawing/2014/main" id="{CC5EE22C-F7F1-481B-B981-4221CE8F39D9}"/>
               </a:ext>
             </a:extLst>
           </p:cNvPr>
@@ -12635,7 +12643,7 @@
           <p:cNvPr id="18" name="">
             <a:extLst xmlns:a="http://schemas.openxmlformats.org/drawingml/2006/main">
               <a:ext uri="{FF2B5EF4-FFF2-40B4-BE49-F238E27FC236}">
-                <a16:creationId xmlns:a16="http://schemas.microsoft.com/office/drawing/2014/main" id="{3B351DB3-A602-4BFC-AA30-C7BB0DDAB1A0}"/>
+                <a16:creationId xmlns:a16="http://schemas.microsoft.com/office/drawing/2014/main" id="{EED17AB9-C324-4B66-A2EB-B67FD8F965CC}"/>
               </a:ext>
             </a:extLst>
           </p:cNvPr>
@@ -12669,7 +12677,7 @@
           <p:cNvPr id="19" name="">
             <a:extLst xmlns:a="http://schemas.openxmlformats.org/drawingml/2006/main">
               <a:ext uri="{FF2B5EF4-FFF2-40B4-BE49-F238E27FC236}">
-                <a16:creationId xmlns:a16="http://schemas.microsoft.com/office/drawing/2014/main" id="{6D3CFB1E-7B2D-4410-8966-42EE23316853}"/>
+                <a16:creationId xmlns:a16="http://schemas.microsoft.com/office/drawing/2014/main" id="{86E8B18A-D077-439A-A242-63DFE6F6B5CC}"/>
               </a:ext>
             </a:extLst>
           </p:cNvPr>
@@ -12701,7 +12709,7 @@
           <p:cNvPr id="20" name="">
             <a:extLst xmlns:a="http://schemas.openxmlformats.org/drawingml/2006/main">
               <a:ext uri="{FF2B5EF4-FFF2-40B4-BE49-F238E27FC236}">
-                <a16:creationId xmlns:a16="http://schemas.microsoft.com/office/drawing/2014/main" id="{35E137B5-EEB3-4046-AF6C-7978C59E3184}"/>
+                <a16:creationId xmlns:a16="http://schemas.microsoft.com/office/drawing/2014/main" id="{A0115909-968F-4FF0-896F-396DB6427183}"/>
               </a:ext>
             </a:extLst>
           </p:cNvPr>
@@ -12758,7 +12766,7 @@
           <p:cNvPr id="21" name="">
             <a:extLst xmlns:a="http://schemas.openxmlformats.org/drawingml/2006/main">
               <a:ext uri="{FF2B5EF4-FFF2-40B4-BE49-F238E27FC236}">
-                <a16:creationId xmlns:a16="http://schemas.microsoft.com/office/drawing/2014/main" id="{98BFA13D-D56C-4282-B3F3-5C9EE83A0681}"/>
+                <a16:creationId xmlns:a16="http://schemas.microsoft.com/office/drawing/2014/main" id="{560EAB52-BBE3-4C4E-8A71-2C6262A34777}"/>
               </a:ext>
             </a:extLst>
           </p:cNvPr>
@@ -12815,7 +12823,7 @@
           <p:cNvPr id="22" name="">
             <a:extLst xmlns:a="http://schemas.openxmlformats.org/drawingml/2006/main">
               <a:ext uri="{FF2B5EF4-FFF2-40B4-BE49-F238E27FC236}">
-                <a16:creationId xmlns:a16="http://schemas.microsoft.com/office/drawing/2014/main" id="{7E7BF627-6DCA-4F61-9947-44C47E5D973D}"/>
+                <a16:creationId xmlns:a16="http://schemas.microsoft.com/office/drawing/2014/main" id="{EE9229F2-8541-4A00-BF1A-489B2235F275}"/>
               </a:ext>
             </a:extLst>
           </p:cNvPr>
@@ -12870,7 +12878,7 @@
     </p:spTree>
     <p:extLst>
       <p:ext uri="{BB962C8B-B14F-4D97-AF65-F5344CB8AC3E}">
-        <p14:creationId xmlns:p14="http://schemas.microsoft.com/office/powerpoint/2010/main" val="762426998"/>
+        <p14:creationId xmlns:p14="http://schemas.microsoft.com/office/powerpoint/2010/main" val="1590829896"/>
       </p:ext>
     </p:extLst>
   </p:cSld>
@@ -13071,7 +13079,7 @@
           <p:cNvPr id="22" name="">
             <a:extLst xmlns:a="http://schemas.openxmlformats.org/drawingml/2006/main">
               <a:ext uri="{FF2B5EF4-FFF2-40B4-BE49-F238E27FC236}">
-                <a16:creationId xmlns:a16="http://schemas.microsoft.com/office/drawing/2014/main" id="{AAFF26E5-E62B-4D12-AFFF-F90AC8A40D4A}"/>
+                <a16:creationId xmlns:a16="http://schemas.microsoft.com/office/drawing/2014/main" id="{8B537A17-D12F-450D-91CB-5377D3545FE6}"/>
               </a:ext>
             </a:extLst>
           </p:cNvPr>
@@ -13103,7 +13111,7 @@
           <p:cNvPr id="2" name="">
             <a:extLst xmlns:a="http://schemas.openxmlformats.org/drawingml/2006/main">
               <a:ext uri="{FF2B5EF4-FFF2-40B4-BE49-F238E27FC236}">
-                <a16:creationId xmlns:a16="http://schemas.microsoft.com/office/drawing/2014/main" id="{A40A47C1-64CD-4F25-950E-DD011350D806}"/>
+                <a16:creationId xmlns:a16="http://schemas.microsoft.com/office/drawing/2014/main" id="{389690E4-CFAF-4116-8ECE-3743A79C5F6D}"/>
               </a:ext>
             </a:extLst>
           </p:cNvPr>
@@ -13160,7 +13168,7 @@
           <p:cNvPr id="3" name="">
             <a:extLst xmlns:a="http://schemas.openxmlformats.org/drawingml/2006/main">
               <a:ext uri="{FF2B5EF4-FFF2-40B4-BE49-F238E27FC236}">
-                <a16:creationId xmlns:a16="http://schemas.microsoft.com/office/drawing/2014/main" id="{B5973DD5-1F48-4610-BD7E-9D41CF5EA055}"/>
+                <a16:creationId xmlns:a16="http://schemas.microsoft.com/office/drawing/2014/main" id="{CA72AE48-0E5E-4733-8F4A-A61393B9DF8C}"/>
               </a:ext>
             </a:extLst>
           </p:cNvPr>
@@ -13192,7 +13200,7 @@
           <p:cNvPr id="4" name="">
             <a:extLst xmlns:a="http://schemas.openxmlformats.org/drawingml/2006/main">
               <a:ext uri="{FF2B5EF4-FFF2-40B4-BE49-F238E27FC236}">
-                <a16:creationId xmlns:a16="http://schemas.microsoft.com/office/drawing/2014/main" id="{C18E26FA-D9A0-45DE-8BCC-AC4F5F9AE2B6}"/>
+                <a16:creationId xmlns:a16="http://schemas.microsoft.com/office/drawing/2014/main" id="{019C8A1A-A665-44A7-85E9-949B56D7269F}"/>
               </a:ext>
             </a:extLst>
           </p:cNvPr>
@@ -13249,7 +13257,7 @@
           <p:cNvPr id="5" name="">
             <a:extLst xmlns:a="http://schemas.openxmlformats.org/drawingml/2006/main">
               <a:ext uri="{FF2B5EF4-FFF2-40B4-BE49-F238E27FC236}">
-                <a16:creationId xmlns:a16="http://schemas.microsoft.com/office/drawing/2014/main" id="{8DB171B4-FBD4-47A1-A757-47CEFAF2862E}"/>
+                <a16:creationId xmlns:a16="http://schemas.microsoft.com/office/drawing/2014/main" id="{F903C3DD-900A-4444-9289-CA5A56B16187}"/>
               </a:ext>
             </a:extLst>
           </p:cNvPr>
@@ -13306,7 +13314,7 @@
           <p:cNvPr id="6" name="">
             <a:extLst xmlns:a="http://schemas.openxmlformats.org/drawingml/2006/main">
               <a:ext uri="{FF2B5EF4-FFF2-40B4-BE49-F238E27FC236}">
-                <a16:creationId xmlns:a16="http://schemas.microsoft.com/office/drawing/2014/main" id="{26BF5676-B1E6-4379-8BA4-95F37BF472CE}"/>
+                <a16:creationId xmlns:a16="http://schemas.microsoft.com/office/drawing/2014/main" id="{5958E272-7E84-4CF2-8DA3-2430B9D56008}"/>
               </a:ext>
             </a:extLst>
           </p:cNvPr>
@@ -13363,7 +13371,7 @@
           <p:cNvPr id="7" name="">
             <a:extLst xmlns:a="http://schemas.openxmlformats.org/drawingml/2006/main">
               <a:ext uri="{FF2B5EF4-FFF2-40B4-BE49-F238E27FC236}">
-                <a16:creationId xmlns:a16="http://schemas.microsoft.com/office/drawing/2014/main" id="{C8D4E841-EDF1-4636-9351-728EFA6EC8F4}"/>
+                <a16:creationId xmlns:a16="http://schemas.microsoft.com/office/drawing/2014/main" id="{2BA8D638-8BFA-4CB6-A920-816727F75101}"/>
               </a:ext>
             </a:extLst>
           </p:cNvPr>
@@ -13395,7 +13403,7 @@
           <p:cNvPr id="8" name="">
             <a:extLst xmlns:a="http://schemas.openxmlformats.org/drawingml/2006/main">
               <a:ext uri="{FF2B5EF4-FFF2-40B4-BE49-F238E27FC236}">
-                <a16:creationId xmlns:a16="http://schemas.microsoft.com/office/drawing/2014/main" id="{EDB92C96-B111-4785-93A8-3675BB9409C6}"/>
+                <a16:creationId xmlns:a16="http://schemas.microsoft.com/office/drawing/2014/main" id="{EB4899F7-620A-4308-BFE3-E59AC7A83AE0}"/>
               </a:ext>
             </a:extLst>
           </p:cNvPr>
@@ -13452,7 +13460,7 @@
           <p:cNvPr id="9" name="">
             <a:extLst xmlns:a="http://schemas.openxmlformats.org/drawingml/2006/main">
               <a:ext uri="{FF2B5EF4-FFF2-40B4-BE49-F238E27FC236}">
-                <a16:creationId xmlns:a16="http://schemas.microsoft.com/office/drawing/2014/main" id="{CA18EAE2-9B7C-4DA0-B244-3978EF101FFF}"/>
+                <a16:creationId xmlns:a16="http://schemas.microsoft.com/office/drawing/2014/main" id="{4FDF4EF4-FCB8-4831-9A7F-B2496F0CA622}"/>
               </a:ext>
             </a:extLst>
           </p:cNvPr>
@@ -13509,7 +13517,7 @@
           <p:cNvPr id="10" name="">
             <a:extLst xmlns:a="http://schemas.openxmlformats.org/drawingml/2006/main">
               <a:ext uri="{FF2B5EF4-FFF2-40B4-BE49-F238E27FC236}">
-                <a16:creationId xmlns:a16="http://schemas.microsoft.com/office/drawing/2014/main" id="{5234DBCC-8CBF-4039-B790-D50175195399}"/>
+                <a16:creationId xmlns:a16="http://schemas.microsoft.com/office/drawing/2014/main" id="{19AAD962-0272-42F5-BB59-980FECF5B65C}"/>
               </a:ext>
             </a:extLst>
           </p:cNvPr>
@@ -13543,7 +13551,7 @@
           <p:cNvPr id="11" name="">
             <a:extLst xmlns:a="http://schemas.openxmlformats.org/drawingml/2006/main">
               <a:ext uri="{FF2B5EF4-FFF2-40B4-BE49-F238E27FC236}">
-                <a16:creationId xmlns:a16="http://schemas.microsoft.com/office/drawing/2014/main" id="{B2D163EC-D7B7-4569-BAE7-F4FC962A8071}"/>
+                <a16:creationId xmlns:a16="http://schemas.microsoft.com/office/drawing/2014/main" id="{C15A4F7C-F7D4-4BDE-8EE3-B2A93EC6C907}"/>
               </a:ext>
             </a:extLst>
           </p:cNvPr>
@@ -13575,7 +13583,7 @@
           <p:cNvPr id="12" name="">
             <a:extLst xmlns:a="http://schemas.openxmlformats.org/drawingml/2006/main">
               <a:ext uri="{FF2B5EF4-FFF2-40B4-BE49-F238E27FC236}">
-                <a16:creationId xmlns:a16="http://schemas.microsoft.com/office/drawing/2014/main" id="{C3EC185D-9E0A-4ABC-B9D7-0A369AB7ABF0}"/>
+                <a16:creationId xmlns:a16="http://schemas.microsoft.com/office/drawing/2014/main" id="{B509BA5C-D0F1-48E2-8BDB-6B5DDE330F18}"/>
               </a:ext>
             </a:extLst>
           </p:cNvPr>
@@ -13632,7 +13640,7 @@
           <p:cNvPr id="13" name="">
             <a:extLst xmlns:a="http://schemas.openxmlformats.org/drawingml/2006/main">
               <a:ext uri="{FF2B5EF4-FFF2-40B4-BE49-F238E27FC236}">
-                <a16:creationId xmlns:a16="http://schemas.microsoft.com/office/drawing/2014/main" id="{77EC07AF-B89C-478C-84CB-0C712E54B3F3}"/>
+                <a16:creationId xmlns:a16="http://schemas.microsoft.com/office/drawing/2014/main" id="{2101F762-8E09-4B29-97E0-6A26E3EC2B8A}"/>
               </a:ext>
             </a:extLst>
           </p:cNvPr>
@@ -13689,7 +13697,7 @@
           <p:cNvPr id="14" name="">
             <a:extLst xmlns:a="http://schemas.openxmlformats.org/drawingml/2006/main">
               <a:ext uri="{FF2B5EF4-FFF2-40B4-BE49-F238E27FC236}">
-                <a16:creationId xmlns:a16="http://schemas.microsoft.com/office/drawing/2014/main" id="{7B2A925A-963C-4553-80E9-A863E6AE271E}"/>
+                <a16:creationId xmlns:a16="http://schemas.microsoft.com/office/drawing/2014/main" id="{BCE1C7F0-7387-4F70-8C7A-773F207741E3}"/>
               </a:ext>
             </a:extLst>
           </p:cNvPr>
@@ -13723,7 +13731,7 @@
           <p:cNvPr id="15" name="">
             <a:extLst xmlns:a="http://schemas.openxmlformats.org/drawingml/2006/main">
               <a:ext uri="{FF2B5EF4-FFF2-40B4-BE49-F238E27FC236}">
-                <a16:creationId xmlns:a16="http://schemas.microsoft.com/office/drawing/2014/main" id="{393F2188-1C00-4CDC-A72E-85D54FCDCC47}"/>
+                <a16:creationId xmlns:a16="http://schemas.microsoft.com/office/drawing/2014/main" id="{E6096558-E1C6-4484-9E71-443EB7AA7CFC}"/>
               </a:ext>
             </a:extLst>
           </p:cNvPr>
@@ -13755,7 +13763,7 @@
           <p:cNvPr id="16" name="">
             <a:extLst xmlns:a="http://schemas.openxmlformats.org/drawingml/2006/main">
               <a:ext uri="{FF2B5EF4-FFF2-40B4-BE49-F238E27FC236}">
-                <a16:creationId xmlns:a16="http://schemas.microsoft.com/office/drawing/2014/main" id="{77AA890C-EB5E-4C38-9EC9-73DD9AF7226C}"/>
+                <a16:creationId xmlns:a16="http://schemas.microsoft.com/office/drawing/2014/main" id="{E6A42981-4459-4E0B-83A5-1A9CCC534929}"/>
               </a:ext>
             </a:extLst>
           </p:cNvPr>
@@ -13812,7 +13820,7 @@
           <p:cNvPr id="17" name="">
             <a:extLst xmlns:a="http://schemas.openxmlformats.org/drawingml/2006/main">
               <a:ext uri="{FF2B5EF4-FFF2-40B4-BE49-F238E27FC236}">
-                <a16:creationId xmlns:a16="http://schemas.microsoft.com/office/drawing/2014/main" id="{90EBB55E-CE71-4014-82F1-E9A542C54773}"/>
+                <a16:creationId xmlns:a16="http://schemas.microsoft.com/office/drawing/2014/main" id="{2156D23E-DA19-4ADE-96EF-355CE8F9EE95}"/>
               </a:ext>
             </a:extLst>
           </p:cNvPr>
@@ -13869,7 +13877,7 @@
           <p:cNvPr id="18" name="">
             <a:extLst xmlns:a="http://schemas.openxmlformats.org/drawingml/2006/main">
               <a:ext uri="{FF2B5EF4-FFF2-40B4-BE49-F238E27FC236}">
-                <a16:creationId xmlns:a16="http://schemas.microsoft.com/office/drawing/2014/main" id="{F543E4E7-0783-49CC-98D9-17DD8C321C07}"/>
+                <a16:creationId xmlns:a16="http://schemas.microsoft.com/office/drawing/2014/main" id="{C2496383-69DD-478F-A031-36561E07CD43}"/>
               </a:ext>
             </a:extLst>
           </p:cNvPr>
@@ -13903,7 +13911,7 @@
           <p:cNvPr id="19" name="">
             <a:extLst xmlns:a="http://schemas.openxmlformats.org/drawingml/2006/main">
               <a:ext uri="{FF2B5EF4-FFF2-40B4-BE49-F238E27FC236}">
-                <a16:creationId xmlns:a16="http://schemas.microsoft.com/office/drawing/2014/main" id="{4ACEF22A-9BA9-41EC-8C0F-E0B30CB614BC}"/>
+                <a16:creationId xmlns:a16="http://schemas.microsoft.com/office/drawing/2014/main" id="{6125B2D1-BBFB-4C04-AB8A-42E0EE7A587B}"/>
               </a:ext>
             </a:extLst>
           </p:cNvPr>
@@ -13935,7 +13943,7 @@
           <p:cNvPr id="20" name="">
             <a:extLst xmlns:a="http://schemas.openxmlformats.org/drawingml/2006/main">
               <a:ext uri="{FF2B5EF4-FFF2-40B4-BE49-F238E27FC236}">
-                <a16:creationId xmlns:a16="http://schemas.microsoft.com/office/drawing/2014/main" id="{3501241A-C704-477E-88F7-1F1D19826BF0}"/>
+                <a16:creationId xmlns:a16="http://schemas.microsoft.com/office/drawing/2014/main" id="{4E177811-07B0-4B62-833D-96FDDE25DFA1}"/>
               </a:ext>
             </a:extLst>
           </p:cNvPr>
@@ -13992,7 +14000,7 @@
           <p:cNvPr id="21" name="">
             <a:extLst xmlns:a="http://schemas.openxmlformats.org/drawingml/2006/main">
               <a:ext uri="{FF2B5EF4-FFF2-40B4-BE49-F238E27FC236}">
-                <a16:creationId xmlns:a16="http://schemas.microsoft.com/office/drawing/2014/main" id="{FBCD83EE-EE35-415F-9565-8C3A8EE97BC2}"/>
+                <a16:creationId xmlns:a16="http://schemas.microsoft.com/office/drawing/2014/main" id="{A03326ED-4F3C-4EB4-B4E4-2A03308CB2D9}"/>
               </a:ext>
             </a:extLst>
           </p:cNvPr>
@@ -14047,7 +14055,7 @@
     </p:spTree>
     <p:extLst>
       <p:ext uri="{BB962C8B-B14F-4D97-AF65-F5344CB8AC3E}">
-        <p14:creationId xmlns:p14="http://schemas.microsoft.com/office/powerpoint/2010/main" val="55138683"/>
+        <p14:creationId xmlns:p14="http://schemas.microsoft.com/office/powerpoint/2010/main" val="129376620"/>
       </p:ext>
     </p:extLst>
   </p:cSld>
